--- a/presentation/Hotel_Reservation_Sprint1_Review_Compatible.pptx
+++ b/presentation/Hotel_Reservation_Sprint1_Review_Compatible.pptx
@@ -3,21 +3,21 @@
 <p:presentation xmlns:a="http://schemas.openxmlformats.org/drawingml/2006/main" xmlns:r="http://schemas.openxmlformats.org/officeDocument/2006/relationships" xmlns:p="http://schemas.openxmlformats.org/presentationml/2006/main">
   <p:sldMasterIdLst>
     <p:sldMasterId id="2147483648" r:id="rId1"/>
-    <p:sldMasterId id="2147483649" r:id="rId2"/>
+    <p:sldMasterId id="2147483649" r:id="rId3"/>
   </p:sldMasterIdLst>
   <p:notesMasterIdLst>
-    <p:notesMasterId r:id="rId12"/>
+    <p:notesMasterId r:id="rId5"/>
   </p:notesMasterIdLst>
   <p:sldIdLst>
-    <p:sldId id="256" r:id="rId3"/>
-    <p:sldId id="257" r:id="rId4"/>
-    <p:sldId id="258" r:id="rId5"/>
-    <p:sldId id="259" r:id="rId6"/>
-    <p:sldId id="260" r:id="rId7"/>
-    <p:sldId id="261" r:id="rId8"/>
-    <p:sldId id="262" r:id="rId9"/>
-    <p:sldId id="263" r:id="rId10"/>
-    <p:sldId id="264" r:id="rId11"/>
+    <p:sldId id="256" r:id="rId4"/>
+    <p:sldId id="257" r:id="rId6"/>
+    <p:sldId id="258" r:id="rId7"/>
+    <p:sldId id="259" r:id="rId8"/>
+    <p:sldId id="260" r:id="rId9"/>
+    <p:sldId id="261" r:id="rId10"/>
+    <p:sldId id="262" r:id="rId11"/>
+    <p:sldId id="263" r:id="rId12"/>
+    <p:sldId id="264" r:id="rId13"/>
   </p:sldIdLst>
   <p:sldSz cx="12192000" cy="6858000"/>
   <p:notesSz cx="6858000" cy="12192000"/>
@@ -116,11 +116,6 @@
       </a:defRPr>
     </a:lvl9pPr>
   </p:defaultTextStyle>
-  <p:extLst>
-    <p:ext uri="{EFAFB233-063F-42B5-8137-9DF3F51BA10A}">
-      <p15:sldGuideLst xmlns:p15="http://schemas.microsoft.com/office/powerpoint/2012/main"/>
-    </p:ext>
-  </p:extLst>
 </p:presentation>
 </file>
 
@@ -186,6 +181,14 @@
               </a:rPr>
               <a:t>Click to move the slide</a:t>
             </a:r>
+            <a:endParaRPr lang="en-US" sz="1800" b="0" u="none" strike="noStrike">
+              <a:solidFill>
+                <a:schemeClr val="dk1"/>
+              </a:solidFill>
+              <a:effectLst/>
+              <a:uFillTx/>
+              <a:latin typeface="Aptos"/>
+            </a:endParaRPr>
           </a:p>
         </p:txBody>
       </p:sp>
@@ -228,10 +231,18 @@
                 </a:solidFill>
                 <a:effectLst/>
                 <a:uFillTx/>
-                <a:latin typeface="Arial"/>
+                <a:latin typeface="Arial" panose="020B0604020202020204"/>
               </a:rPr>
               <a:t>Click to edit the notes format</a:t>
             </a:r>
+            <a:endParaRPr lang="en-US" sz="2000" b="0" u="none" strike="noStrike">
+              <a:solidFill>
+                <a:srgbClr val="000000"/>
+              </a:solidFill>
+              <a:effectLst/>
+              <a:uFillTx/>
+              <a:latin typeface="Arial" panose="020B0604020202020204"/>
+            </a:endParaRPr>
           </a:p>
         </p:txBody>
       </p:sp>
@@ -274,10 +285,18 @@
                 </a:solidFill>
                 <a:effectLst/>
                 <a:uFillTx/>
-                <a:latin typeface="Times New Roman"/>
+                <a:latin typeface="Times New Roman" panose="02020603050405020304"/>
               </a:rPr>
               <a:t>&lt;header&gt;</a:t>
             </a:r>
+            <a:endParaRPr lang="en-US" sz="1400" b="0" u="none" strike="noStrike">
+              <a:solidFill>
+                <a:srgbClr val="000000"/>
+              </a:solidFill>
+              <a:effectLst/>
+              <a:uFillTx/>
+              <a:latin typeface="Times New Roman" panose="02020603050405020304"/>
+            </a:endParaRPr>
           </a:p>
         </p:txBody>
       </p:sp>
@@ -317,7 +336,7 @@
                 </a:solidFill>
                 <a:effectLst/>
                 <a:uFillTx/>
-                <a:latin typeface="Times New Roman"/>
+                <a:latin typeface="Times New Roman" panose="02020603050405020304"/>
               </a:defRPr>
             </a:lvl1pPr>
           </a:lstStyle>
@@ -332,10 +351,18 @@
                 </a:solidFill>
                 <a:effectLst/>
                 <a:uFillTx/>
-                <a:latin typeface="Times New Roman"/>
+                <a:latin typeface="Times New Roman" panose="02020603050405020304"/>
               </a:rPr>
               <a:t>&lt;date/time&gt;</a:t>
             </a:r>
+            <a:endParaRPr lang="en-US" sz="1400" b="0" u="none" strike="noStrike">
+              <a:solidFill>
+                <a:srgbClr val="000000"/>
+              </a:solidFill>
+              <a:effectLst/>
+              <a:uFillTx/>
+              <a:latin typeface="Times New Roman" panose="02020603050405020304"/>
+            </a:endParaRPr>
           </a:p>
         </p:txBody>
       </p:sp>
@@ -375,7 +402,7 @@
                 </a:solidFill>
                 <a:effectLst/>
                 <a:uFillTx/>
-                <a:latin typeface="Times New Roman"/>
+                <a:latin typeface="Times New Roman" panose="02020603050405020304"/>
               </a:defRPr>
             </a:lvl1pPr>
           </a:lstStyle>
@@ -390,10 +417,18 @@
                 </a:solidFill>
                 <a:effectLst/>
                 <a:uFillTx/>
-                <a:latin typeface="Times New Roman"/>
+                <a:latin typeface="Times New Roman" panose="02020603050405020304"/>
               </a:rPr>
               <a:t>&lt;footer&gt;</a:t>
             </a:r>
+            <a:endParaRPr lang="en-US" sz="1400" b="0" u="none" strike="noStrike">
+              <a:solidFill>
+                <a:srgbClr val="000000"/>
+              </a:solidFill>
+              <a:effectLst/>
+              <a:uFillTx/>
+              <a:latin typeface="Times New Roman" panose="02020603050405020304"/>
+            </a:endParaRPr>
           </a:p>
         </p:txBody>
       </p:sp>
@@ -433,7 +468,7 @@
                 </a:solidFill>
                 <a:effectLst/>
                 <a:uFillTx/>
-                <a:latin typeface="Times New Roman"/>
+                <a:latin typeface="Times New Roman" panose="02020603050405020304"/>
               </a:defRPr>
             </a:lvl1pPr>
           </a:lstStyle>
@@ -448,9 +483,8 @@
                 </a:solidFill>
                 <a:effectLst/>
                 <a:uFillTx/>
-                <a:latin typeface="Times New Roman"/>
+                <a:latin typeface="Times New Roman" panose="02020603050405020304"/>
               </a:rPr>
-              <a:t>‹#›</a:t>
             </a:fld>
             <a:endParaRPr lang="en-US" sz="1400" b="0" u="none" strike="noStrike">
               <a:solidFill>
@@ -458,7 +492,7 @@
               </a:solidFill>
               <a:effectLst/>
               <a:uFillTx/>
-              <a:latin typeface="Times New Roman"/>
+              <a:latin typeface="Times New Roman" panose="02020603050405020304"/>
             </a:endParaRPr>
           </a:p>
         </p:txBody>
@@ -639,7 +673,7 @@
               </a:solidFill>
               <a:effectLst/>
               <a:uFillTx/>
-              <a:latin typeface="Arial"/>
+              <a:latin typeface="Arial" panose="020B0604020202020204"/>
             </a:endParaRPr>
           </a:p>
         </p:txBody>
@@ -705,7 +739,6 @@
                 <a:latin typeface="+mn-lt"/>
                 <a:ea typeface="+mn-ea"/>
               </a:rPr>
-              <a:t>1</a:t>
             </a:fld>
             <a:endParaRPr lang="en-US" sz="1200" b="0" u="none" strike="noStrike">
               <a:solidFill>
@@ -713,7 +746,7 @@
               </a:solidFill>
               <a:effectLst/>
               <a:uFillTx/>
-              <a:latin typeface="Times New Roman"/>
+              <a:latin typeface="Times New Roman" panose="02020603050405020304"/>
             </a:endParaRPr>
           </a:p>
         </p:txBody>
@@ -804,7 +837,7 @@
               </a:solidFill>
               <a:effectLst/>
               <a:uFillTx/>
-              <a:latin typeface="Arial"/>
+              <a:latin typeface="Arial" panose="020B0604020202020204"/>
             </a:endParaRPr>
           </a:p>
         </p:txBody>
@@ -870,7 +903,6 @@
                 <a:latin typeface="+mn-lt"/>
                 <a:ea typeface="+mn-ea"/>
               </a:rPr>
-              <a:t>2</a:t>
             </a:fld>
             <a:endParaRPr lang="en-US" sz="1200" b="0" u="none" strike="noStrike">
               <a:solidFill>
@@ -878,7 +910,7 @@
               </a:solidFill>
               <a:effectLst/>
               <a:uFillTx/>
-              <a:latin typeface="Times New Roman"/>
+              <a:latin typeface="Times New Roman" panose="02020603050405020304"/>
             </a:endParaRPr>
           </a:p>
         </p:txBody>
@@ -969,7 +1001,7 @@
               </a:solidFill>
               <a:effectLst/>
               <a:uFillTx/>
-              <a:latin typeface="Arial"/>
+              <a:latin typeface="Arial" panose="020B0604020202020204"/>
             </a:endParaRPr>
           </a:p>
         </p:txBody>
@@ -1035,7 +1067,6 @@
                 <a:latin typeface="+mn-lt"/>
                 <a:ea typeface="+mn-ea"/>
               </a:rPr>
-              <a:t>3</a:t>
             </a:fld>
             <a:endParaRPr lang="en-US" sz="1200" b="0" u="none" strike="noStrike">
               <a:solidFill>
@@ -1043,7 +1074,7 @@
               </a:solidFill>
               <a:effectLst/>
               <a:uFillTx/>
-              <a:latin typeface="Times New Roman"/>
+              <a:latin typeface="Times New Roman" panose="02020603050405020304"/>
             </a:endParaRPr>
           </a:p>
         </p:txBody>
@@ -1134,7 +1165,7 @@
               </a:solidFill>
               <a:effectLst/>
               <a:uFillTx/>
-              <a:latin typeface="Arial"/>
+              <a:latin typeface="Arial" panose="020B0604020202020204"/>
             </a:endParaRPr>
           </a:p>
         </p:txBody>
@@ -1200,7 +1231,6 @@
                 <a:latin typeface="+mn-lt"/>
                 <a:ea typeface="+mn-ea"/>
               </a:rPr>
-              <a:t>4</a:t>
             </a:fld>
             <a:endParaRPr lang="en-US" sz="1200" b="0" u="none" strike="noStrike">
               <a:solidFill>
@@ -1208,7 +1238,7 @@
               </a:solidFill>
               <a:effectLst/>
               <a:uFillTx/>
-              <a:latin typeface="Times New Roman"/>
+              <a:latin typeface="Times New Roman" panose="02020603050405020304"/>
             </a:endParaRPr>
           </a:p>
         </p:txBody>
@@ -1299,7 +1329,7 @@
               </a:solidFill>
               <a:effectLst/>
               <a:uFillTx/>
-              <a:latin typeface="Arial"/>
+              <a:latin typeface="Arial" panose="020B0604020202020204"/>
             </a:endParaRPr>
           </a:p>
         </p:txBody>
@@ -1365,7 +1395,6 @@
                 <a:latin typeface="+mn-lt"/>
                 <a:ea typeface="+mn-ea"/>
               </a:rPr>
-              <a:t>5</a:t>
             </a:fld>
             <a:endParaRPr lang="en-US" sz="1200" b="0" u="none" strike="noStrike">
               <a:solidFill>
@@ -1373,7 +1402,7 @@
               </a:solidFill>
               <a:effectLst/>
               <a:uFillTx/>
-              <a:latin typeface="Times New Roman"/>
+              <a:latin typeface="Times New Roman" panose="02020603050405020304"/>
             </a:endParaRPr>
           </a:p>
         </p:txBody>
@@ -1464,7 +1493,7 @@
               </a:solidFill>
               <a:effectLst/>
               <a:uFillTx/>
-              <a:latin typeface="Arial"/>
+              <a:latin typeface="Arial" panose="020B0604020202020204"/>
             </a:endParaRPr>
           </a:p>
         </p:txBody>
@@ -1530,7 +1559,6 @@
                 <a:latin typeface="+mn-lt"/>
                 <a:ea typeface="+mn-ea"/>
               </a:rPr>
-              <a:t>6</a:t>
             </a:fld>
             <a:endParaRPr lang="en-US" sz="1200" b="0" u="none" strike="noStrike">
               <a:solidFill>
@@ -1538,7 +1566,7 @@
               </a:solidFill>
               <a:effectLst/>
               <a:uFillTx/>
-              <a:latin typeface="Times New Roman"/>
+              <a:latin typeface="Times New Roman" panose="02020603050405020304"/>
             </a:endParaRPr>
           </a:p>
         </p:txBody>
@@ -1629,7 +1657,7 @@
               </a:solidFill>
               <a:effectLst/>
               <a:uFillTx/>
-              <a:latin typeface="Arial"/>
+              <a:latin typeface="Arial" panose="020B0604020202020204"/>
             </a:endParaRPr>
           </a:p>
         </p:txBody>
@@ -1695,7 +1723,6 @@
                 <a:latin typeface="+mn-lt"/>
                 <a:ea typeface="+mn-ea"/>
               </a:rPr>
-              <a:t>7</a:t>
             </a:fld>
             <a:endParaRPr lang="en-US" sz="1200" b="0" u="none" strike="noStrike">
               <a:solidFill>
@@ -1703,7 +1730,7 @@
               </a:solidFill>
               <a:effectLst/>
               <a:uFillTx/>
-              <a:latin typeface="Times New Roman"/>
+              <a:latin typeface="Times New Roman" panose="02020603050405020304"/>
             </a:endParaRPr>
           </a:p>
         </p:txBody>
@@ -1794,7 +1821,7 @@
               </a:solidFill>
               <a:effectLst/>
               <a:uFillTx/>
-              <a:latin typeface="Arial"/>
+              <a:latin typeface="Arial" panose="020B0604020202020204"/>
             </a:endParaRPr>
           </a:p>
         </p:txBody>
@@ -1860,7 +1887,6 @@
                 <a:latin typeface="+mn-lt"/>
                 <a:ea typeface="+mn-ea"/>
               </a:rPr>
-              <a:t>8</a:t>
             </a:fld>
             <a:endParaRPr lang="en-US" sz="1200" b="0" u="none" strike="noStrike">
               <a:solidFill>
@@ -1868,7 +1894,7 @@
               </a:solidFill>
               <a:effectLst/>
               <a:uFillTx/>
-              <a:latin typeface="Times New Roman"/>
+              <a:latin typeface="Times New Roman" panose="02020603050405020304"/>
             </a:endParaRPr>
           </a:p>
         </p:txBody>
@@ -1959,7 +1985,7 @@
               </a:solidFill>
               <a:effectLst/>
               <a:uFillTx/>
-              <a:latin typeface="Arial"/>
+              <a:latin typeface="Arial" panose="020B0604020202020204"/>
             </a:endParaRPr>
           </a:p>
         </p:txBody>
@@ -2025,7 +2051,6 @@
                 <a:latin typeface="+mn-lt"/>
                 <a:ea typeface="+mn-ea"/>
               </a:rPr>
-              <a:t>9</a:t>
             </a:fld>
             <a:endParaRPr lang="en-US" sz="1200" b="0" u="none" strike="noStrike">
               <a:solidFill>
@@ -2033,7 +2058,7 @@
               </a:solidFill>
               <a:effectLst/>
               <a:uFillTx/>
-              <a:latin typeface="Times New Roman"/>
+              <a:latin typeface="Times New Roman" panose="02020603050405020304"/>
             </a:endParaRPr>
           </a:p>
         </p:txBody>
@@ -2079,7 +2104,7 @@
           <a:lstStyle/>
           <a:p>
             <a:fld id="{F0DE718F-DEA6-4A1D-AE88-EB4004DBB1AA}" type="slidenum">
-              <a:t>‹#›</a:t>
+              <a:rPr/>
             </a:fld>
             <a:endParaRPr/>
           </a:p>
@@ -2191,7 +2216,7 @@
               </a:solidFill>
               <a:effectLst/>
               <a:uFillTx/>
-              <a:latin typeface="Arial"/>
+              <a:latin typeface="Arial" panose="020B0604020202020204"/>
             </a:endParaRPr>
           </a:p>
         </p:txBody>
@@ -2212,7 +2237,7 @@
           <a:lstStyle/>
           <a:p>
             <a:fld id="{C2BE3AC1-87E2-4EB7-9D65-54DA3E80AD3D}" type="slidenum">
-              <a:t>‹#›</a:t>
+              <a:rPr/>
             </a:fld>
             <a:endParaRPr/>
           </a:p>
@@ -2610,7 +2635,7 @@
               </a:solidFill>
               <a:effectLst/>
               <a:uFillTx/>
-              <a:latin typeface="Arial"/>
+              <a:latin typeface="Arial" panose="020B0604020202020204"/>
             </a:endParaRPr>
           </a:p>
         </p:txBody>
@@ -2678,7 +2703,7 @@
               </a:solidFill>
               <a:effectLst/>
               <a:uFillTx/>
-              <a:latin typeface="Arial"/>
+              <a:latin typeface="Arial" panose="020B0604020202020204"/>
             </a:endParaRPr>
           </a:p>
         </p:txBody>
@@ -2746,7 +2771,7 @@
               </a:solidFill>
               <a:effectLst/>
               <a:uFillTx/>
-              <a:latin typeface="Arial"/>
+              <a:latin typeface="Arial" panose="020B0604020202020204"/>
             </a:endParaRPr>
           </a:p>
         </p:txBody>
@@ -2812,7 +2837,6 @@
                 <a:latin typeface="Aptos"/>
                 <a:ea typeface="Aptos"/>
               </a:rPr>
-              <a:t>‹#›</a:t>
             </a:fld>
             <a:endParaRPr lang="en-US" sz="900" b="0" u="none" strike="noStrike">
               <a:solidFill>
@@ -2820,7 +2844,7 @@
               </a:solidFill>
               <a:effectLst/>
               <a:uFillTx/>
-              <a:latin typeface="Times New Roman"/>
+              <a:latin typeface="Times New Roman" panose="02020603050405020304"/>
             </a:endParaRPr>
           </a:p>
         </p:txBody>
@@ -2868,6 +2892,14 @@
               </a:rPr>
               <a:t>Click to edit the title text format</a:t>
             </a:r>
+            <a:endParaRPr lang="en-US" sz="1800" b="0" u="none" strike="noStrike">
+              <a:solidFill>
+                <a:schemeClr val="dk1"/>
+              </a:solidFill>
+              <a:effectLst/>
+              <a:uFillTx/>
+              <a:latin typeface="Aptos"/>
+            </a:endParaRPr>
           </a:p>
         </p:txBody>
       </p:sp>
@@ -2900,15 +2932,15 @@
           </a:bodyPr>
           <a:lstStyle/>
           <a:p>
-            <a:pPr marL="432000" indent="-324000">
+            <a:pPr marL="431800" indent="-323850">
               <a:spcBef>
-                <a:spcPts val="1417"/>
+                <a:spcPts val="1415"/>
               </a:spcBef>
               <a:buClr>
                 <a:srgbClr val="000000"/>
               </a:buClr>
               <a:buSzPct val="45000"/>
-              <a:buFont typeface="Wingdings" charset="2"/>
+              <a:buFont typeface="Wingdings" panose="05000000000000000000" pitchFamily="2" charset="2"/>
               <a:buChar char=""/>
             </a:pPr>
             <a:r>
@@ -2922,17 +2954,25 @@
               </a:rPr>
               <a:t>Click to edit the outline text format</a:t>
             </a:r>
-          </a:p>
-          <a:p>
-            <a:pPr marL="864000" lvl="1" indent="-324000">
+            <a:endParaRPr lang="en-US" sz="3200" b="0" u="none" strike="noStrike">
+              <a:solidFill>
+                <a:schemeClr val="dk1"/>
+              </a:solidFill>
+              <a:effectLst/>
+              <a:uFillTx/>
+              <a:latin typeface="Aptos"/>
+            </a:endParaRPr>
+          </a:p>
+          <a:p>
+            <a:pPr marL="864235" lvl="1" indent="-323850">
               <a:spcBef>
-                <a:spcPts val="1134"/>
+                <a:spcPts val="1135"/>
               </a:spcBef>
               <a:buClr>
                 <a:srgbClr val="000000"/>
               </a:buClr>
               <a:buSzPct val="75000"/>
-              <a:buFont typeface="Symbol" charset="2"/>
+              <a:buFont typeface="Symbol" panose="05050102010706020507" charset="2"/>
               <a:buChar char=""/>
             </a:pPr>
             <a:r>
@@ -2946,9 +2986,17 @@
               </a:rPr>
               <a:t>Second Outline Level</a:t>
             </a:r>
-          </a:p>
-          <a:p>
-            <a:pPr marL="1296000" lvl="2" indent="-288000">
+            <a:endParaRPr lang="en-US" sz="2400" b="0" u="none" strike="noStrike">
+              <a:solidFill>
+                <a:schemeClr val="dk1"/>
+              </a:solidFill>
+              <a:effectLst/>
+              <a:uFillTx/>
+              <a:latin typeface="Aptos"/>
+            </a:endParaRPr>
+          </a:p>
+          <a:p>
+            <a:pPr marL="1296035" lvl="2" indent="-288290">
               <a:spcBef>
                 <a:spcPts val="850"/>
               </a:spcBef>
@@ -2956,7 +3004,7 @@
                 <a:srgbClr val="000000"/>
               </a:buClr>
               <a:buSzPct val="45000"/>
-              <a:buFont typeface="Wingdings" charset="2"/>
+              <a:buFont typeface="Wingdings" panose="05000000000000000000" pitchFamily="2" charset="2"/>
               <a:buChar char=""/>
             </a:pPr>
             <a:r>
@@ -2970,17 +3018,25 @@
               </a:rPr>
               <a:t>Third Outline Level</a:t>
             </a:r>
-          </a:p>
-          <a:p>
-            <a:pPr marL="1728000" lvl="3" indent="-216000">
+            <a:endParaRPr lang="en-US" sz="2000" b="0" u="none" strike="noStrike">
+              <a:solidFill>
+                <a:schemeClr val="dk1"/>
+              </a:solidFill>
+              <a:effectLst/>
+              <a:uFillTx/>
+              <a:latin typeface="Aptos"/>
+            </a:endParaRPr>
+          </a:p>
+          <a:p>
+            <a:pPr marL="1727835" lvl="3" indent="-215900">
               <a:spcBef>
-                <a:spcPts val="567"/>
+                <a:spcPts val="565"/>
               </a:spcBef>
               <a:buClr>
                 <a:srgbClr val="000000"/>
               </a:buClr>
               <a:buSzPct val="75000"/>
-              <a:buFont typeface="Symbol" charset="2"/>
+              <a:buFont typeface="Symbol" panose="05050102010706020507" charset="2"/>
               <a:buChar char=""/>
             </a:pPr>
             <a:r>
@@ -2994,17 +3050,25 @@
               </a:rPr>
               <a:t>Fourth Outline Level</a:t>
             </a:r>
-          </a:p>
-          <a:p>
-            <a:pPr marL="2160000" lvl="4" indent="-216000">
+            <a:endParaRPr lang="en-US" sz="2000" b="0" u="none" strike="noStrike">
+              <a:solidFill>
+                <a:schemeClr val="dk1"/>
+              </a:solidFill>
+              <a:effectLst/>
+              <a:uFillTx/>
+              <a:latin typeface="Aptos"/>
+            </a:endParaRPr>
+          </a:p>
+          <a:p>
+            <a:pPr marL="2160270" lvl="4" indent="-215900">
               <a:spcBef>
-                <a:spcPts val="283"/>
+                <a:spcPts val="285"/>
               </a:spcBef>
               <a:buClr>
                 <a:srgbClr val="000000"/>
               </a:buClr>
               <a:buSzPct val="45000"/>
-              <a:buFont typeface="Wingdings" charset="2"/>
+              <a:buFont typeface="Wingdings" panose="05000000000000000000" pitchFamily="2" charset="2"/>
               <a:buChar char=""/>
             </a:pPr>
             <a:r>
@@ -3018,17 +3082,25 @@
               </a:rPr>
               <a:t>Fifth Outline Level</a:t>
             </a:r>
-          </a:p>
-          <a:p>
-            <a:pPr marL="2592000" lvl="5" indent="-216000">
+            <a:endParaRPr lang="en-US" sz="2000" b="0" u="none" strike="noStrike">
+              <a:solidFill>
+                <a:schemeClr val="dk1"/>
+              </a:solidFill>
+              <a:effectLst/>
+              <a:uFillTx/>
+              <a:latin typeface="Aptos"/>
+            </a:endParaRPr>
+          </a:p>
+          <a:p>
+            <a:pPr marL="2592070" lvl="5" indent="-215900">
               <a:spcBef>
-                <a:spcPts val="283"/>
+                <a:spcPts val="285"/>
               </a:spcBef>
               <a:buClr>
                 <a:srgbClr val="000000"/>
               </a:buClr>
               <a:buSzPct val="45000"/>
-              <a:buFont typeface="Wingdings" charset="2"/>
+              <a:buFont typeface="Wingdings" panose="05000000000000000000" pitchFamily="2" charset="2"/>
               <a:buChar char=""/>
             </a:pPr>
             <a:r>
@@ -3042,17 +3114,25 @@
               </a:rPr>
               <a:t>Sixth Outline Level</a:t>
             </a:r>
-          </a:p>
-          <a:p>
-            <a:pPr marL="3024000" lvl="6" indent="-216000">
+            <a:endParaRPr lang="en-US" sz="2000" b="0" u="none" strike="noStrike">
+              <a:solidFill>
+                <a:schemeClr val="dk1"/>
+              </a:solidFill>
+              <a:effectLst/>
+              <a:uFillTx/>
+              <a:latin typeface="Aptos"/>
+            </a:endParaRPr>
+          </a:p>
+          <a:p>
+            <a:pPr marL="3023870" lvl="6" indent="-215900">
               <a:spcBef>
-                <a:spcPts val="283"/>
+                <a:spcPts val="285"/>
               </a:spcBef>
               <a:buClr>
                 <a:srgbClr val="000000"/>
               </a:buClr>
               <a:buSzPct val="45000"/>
-              <a:buFont typeface="Wingdings" charset="2"/>
+              <a:buFont typeface="Wingdings" panose="05000000000000000000" pitchFamily="2" charset="2"/>
               <a:buChar char=""/>
             </a:pPr>
             <a:r>
@@ -3066,6 +3146,14 @@
               </a:rPr>
               <a:t>Seventh Outline Level</a:t>
             </a:r>
+            <a:endParaRPr lang="en-US" sz="2000" b="0" u="none" strike="noStrike">
+              <a:solidFill>
+                <a:schemeClr val="dk1"/>
+              </a:solidFill>
+              <a:effectLst/>
+              <a:uFillTx/>
+              <a:latin typeface="Aptos"/>
+            </a:endParaRPr>
           </a:p>
         </p:txBody>
       </p:sp>
@@ -3439,7 +3527,7 @@
               </a:solidFill>
               <a:effectLst/>
               <a:uFillTx/>
-              <a:latin typeface="Arial"/>
+              <a:latin typeface="Arial" panose="020B0604020202020204"/>
             </a:endParaRPr>
           </a:p>
           <a:p>
@@ -3469,7 +3557,7 @@
               </a:solidFill>
               <a:effectLst/>
               <a:uFillTx/>
-              <a:latin typeface="Arial"/>
+              <a:latin typeface="Arial" panose="020B0604020202020204"/>
             </a:endParaRPr>
           </a:p>
           <a:p>
@@ -3499,7 +3587,7 @@
               </a:solidFill>
               <a:effectLst/>
               <a:uFillTx/>
-              <a:latin typeface="Arial"/>
+              <a:latin typeface="Arial" panose="020B0604020202020204"/>
             </a:endParaRPr>
           </a:p>
         </p:txBody>
@@ -3566,7 +3654,7 @@
               </a:solidFill>
               <a:effectLst/>
               <a:uFillTx/>
-              <a:latin typeface="Arial"/>
+              <a:latin typeface="Arial" panose="020B0604020202020204"/>
             </a:endParaRPr>
           </a:p>
         </p:txBody>
@@ -3633,7 +3721,7 @@
               </a:solidFill>
               <a:effectLst/>
               <a:uFillTx/>
-              <a:latin typeface="Arial"/>
+              <a:latin typeface="Arial" panose="020B0604020202020204"/>
             </a:endParaRPr>
           </a:p>
         </p:txBody>
@@ -3688,7 +3776,7 @@
               </a:solidFill>
               <a:effectLst/>
               <a:uFillTx/>
-              <a:latin typeface="Arial"/>
+              <a:latin typeface="Arial" panose="020B0604020202020204"/>
             </a:endParaRPr>
           </a:p>
         </p:txBody>
@@ -3755,7 +3843,7 @@
               </a:solidFill>
               <a:effectLst/>
               <a:uFillTx/>
-              <a:latin typeface="Arial"/>
+              <a:latin typeface="Arial" panose="020B0604020202020204"/>
             </a:endParaRPr>
           </a:p>
         </p:txBody>
@@ -3810,7 +3898,7 @@
               </a:solidFill>
               <a:effectLst/>
               <a:uFillTx/>
-              <a:latin typeface="Arial"/>
+              <a:latin typeface="Arial" panose="020B0604020202020204"/>
             </a:endParaRPr>
           </a:p>
         </p:txBody>
@@ -3877,7 +3965,7 @@
               </a:solidFill>
               <a:effectLst/>
               <a:uFillTx/>
-              <a:latin typeface="Arial"/>
+              <a:latin typeface="Arial" panose="020B0604020202020204"/>
             </a:endParaRPr>
           </a:p>
         </p:txBody>
@@ -3932,7 +4020,7 @@
               </a:solidFill>
               <a:effectLst/>
               <a:uFillTx/>
-              <a:latin typeface="Arial"/>
+              <a:latin typeface="Arial" panose="020B0604020202020204"/>
             </a:endParaRPr>
           </a:p>
         </p:txBody>
@@ -3999,7 +4087,7 @@
               </a:solidFill>
               <a:effectLst/>
               <a:uFillTx/>
-              <a:latin typeface="Arial"/>
+              <a:latin typeface="Arial" panose="020B0604020202020204"/>
             </a:endParaRPr>
           </a:p>
         </p:txBody>
@@ -4054,7 +4142,7 @@
               </a:solidFill>
               <a:effectLst/>
               <a:uFillTx/>
-              <a:latin typeface="Arial"/>
+              <a:latin typeface="Arial" panose="020B0604020202020204"/>
             </a:endParaRPr>
           </a:p>
         </p:txBody>
@@ -4121,7 +4209,7 @@
               </a:solidFill>
               <a:effectLst/>
               <a:uFillTx/>
-              <a:latin typeface="Arial"/>
+              <a:latin typeface="Arial" panose="020B0604020202020204"/>
             </a:endParaRPr>
           </a:p>
         </p:txBody>
@@ -4183,21 +4271,21 @@
               </a:solidFill>
               <a:effectLst/>
               <a:uFillTx/>
-              <a:latin typeface="Arial"/>
-            </a:endParaRPr>
-          </a:p>
-        </p:txBody>
-      </p:sp>
-      <p:sp>
-        <p:nvSpPr>
-          <p:cNvPr id="26" name="Text 12"/>
-          <p:cNvSpPr/>
-          <p:nvPr/>
-        </p:nvSpPr>
-        <p:spPr>
-          <a:xfrm>
-            <a:off x="868680" y="4279320"/>
-            <a:ext cx="1325520" cy="228240"/>
+              <a:latin typeface="Arial" panose="020B0604020202020204"/>
+            </a:endParaRPr>
+          </a:p>
+        </p:txBody>
+      </p:sp>
+      <p:sp>
+        <p:nvSpPr>
+          <p:cNvPr id="30" name="Text 16"/>
+          <p:cNvSpPr/>
+          <p:nvPr/>
+        </p:nvSpPr>
+        <p:spPr>
+          <a:xfrm>
+            <a:off x="868680" y="3986530"/>
+            <a:ext cx="4803140" cy="530860"/>
           </a:xfrm>
           <a:prstGeom prst="rect">
             <a:avLst/>
@@ -4234,7 +4322,7 @@
               </a:tabLst>
             </a:pPr>
             <a:r>
-              <a:rPr lang="en-US" sz="1350" b="1" u="none" strike="noStrike">
+              <a:rPr lang="en-US" b="1" u="none" strike="noStrike">
                 <a:solidFill>
                   <a:srgbClr val="586979"/>
                 </a:solidFill>
@@ -4242,299 +4330,15 @@
                 <a:uFillTx/>
                 <a:latin typeface="Aptos"/>
               </a:rPr>
-              <a:t>Student Name</a:t>
+              <a:t>Supervisor:  Pavlo Pustovoitov</a:t>
             </a:r>
-            <a:endParaRPr lang="en-US" sz="1350" b="0" u="none" strike="noStrike">
-              <a:solidFill>
-                <a:srgbClr val="000000"/>
-              </a:solidFill>
-              <a:effectLst/>
-              <a:uFillTx/>
-              <a:latin typeface="Arial"/>
-            </a:endParaRPr>
-          </a:p>
-        </p:txBody>
-      </p:sp>
-      <p:sp>
-        <p:nvSpPr>
-          <p:cNvPr id="27" name="Shape 13"/>
-          <p:cNvSpPr/>
-          <p:nvPr/>
-        </p:nvSpPr>
-        <p:spPr>
-          <a:xfrm>
-            <a:off x="2148840" y="4498560"/>
-            <a:ext cx="3154680" cy="360"/>
-          </a:xfrm>
-          <a:prstGeom prst="line">
-            <a:avLst/>
-          </a:prstGeom>
-          <a:ln w="12600">
-            <a:solidFill>
-              <a:srgbClr val="8793A0"/>
-            </a:solidFill>
-            <a:round/>
-          </a:ln>
-        </p:spPr>
-        <p:style>
-          <a:lnRef idx="0">
-            <a:scrgbClr r="0" g="0" b="0"/>
-          </a:lnRef>
-          <a:fillRef idx="0">
-            <a:scrgbClr r="0" g="0" b="0"/>
-          </a:fillRef>
-          <a:effectRef idx="0">
-            <a:scrgbClr r="0" g="0" b="0"/>
-          </a:effectRef>
-          <a:fontRef idx="minor"/>
-        </p:style>
-        <p:txBody>
-          <a:bodyPr lIns="90000" tIns="-44640" rIns="90000" bIns="-44640" anchor="t" anchorCtr="1">
-            <a:noAutofit/>
-          </a:bodyPr>
-          <a:lstStyle/>
-          <a:p>
-            <a:endParaRPr lang="en-US" sz="1800" b="0" u="none" strike="noStrike">
-              <a:solidFill>
-                <a:srgbClr val="000000"/>
-              </a:solidFill>
-              <a:effectLst/>
-              <a:uFillTx/>
-              <a:latin typeface="Arial"/>
-            </a:endParaRPr>
-          </a:p>
-        </p:txBody>
-      </p:sp>
-      <p:sp>
-        <p:nvSpPr>
-          <p:cNvPr id="28" name="Text 14"/>
-          <p:cNvSpPr/>
-          <p:nvPr/>
-        </p:nvSpPr>
-        <p:spPr>
-          <a:xfrm>
-            <a:off x="868680" y="4736520"/>
-            <a:ext cx="1325520" cy="228240"/>
-          </a:xfrm>
-          <a:prstGeom prst="rect">
-            <a:avLst/>
-          </a:prstGeom>
-          <a:noFill/>
-          <a:ln w="0">
-            <a:noFill/>
-          </a:ln>
-        </p:spPr>
-        <p:style>
-          <a:lnRef idx="0">
-            <a:scrgbClr r="0" g="0" b="0"/>
-          </a:lnRef>
-          <a:fillRef idx="0">
-            <a:scrgbClr r="0" g="0" b="0"/>
-          </a:fillRef>
-          <a:effectRef idx="0">
-            <a:scrgbClr r="0" g="0" b="0"/>
-          </a:effectRef>
-          <a:fontRef idx="minor"/>
-        </p:style>
-        <p:txBody>
-          <a:bodyPr lIns="0" tIns="0" rIns="0" bIns="0" anchor="ctr">
-            <a:noAutofit/>
-          </a:bodyPr>
-          <a:lstStyle/>
-          <a:p>
-            <a:pPr defTabSz="914400">
-              <a:lnSpc>
-                <a:spcPct val="100000"/>
-              </a:lnSpc>
-              <a:tabLst>
-                <a:tab pos="0" algn="l"/>
-              </a:tabLst>
-            </a:pPr>
-            <a:r>
-              <a:rPr lang="en-US" sz="1350" b="1" u="none" strike="noStrike">
-                <a:solidFill>
-                  <a:srgbClr val="586979"/>
-                </a:solidFill>
-                <a:effectLst/>
-                <a:uFillTx/>
-                <a:latin typeface="Aptos"/>
-              </a:rPr>
-              <a:t>Student ID</a:t>
-            </a:r>
-            <a:endParaRPr lang="en-US" sz="1350" b="0" u="none" strike="noStrike">
-              <a:solidFill>
-                <a:srgbClr val="000000"/>
-              </a:solidFill>
-              <a:effectLst/>
-              <a:uFillTx/>
-              <a:latin typeface="Arial"/>
-            </a:endParaRPr>
-          </a:p>
-        </p:txBody>
-      </p:sp>
-      <p:sp>
-        <p:nvSpPr>
-          <p:cNvPr id="29" name="Shape 15"/>
-          <p:cNvSpPr/>
-          <p:nvPr/>
-        </p:nvSpPr>
-        <p:spPr>
-          <a:xfrm>
-            <a:off x="2148840" y="4955760"/>
-            <a:ext cx="3154680" cy="360"/>
-          </a:xfrm>
-          <a:prstGeom prst="line">
-            <a:avLst/>
-          </a:prstGeom>
-          <a:ln w="12600">
-            <a:solidFill>
-              <a:srgbClr val="8793A0"/>
-            </a:solidFill>
-            <a:round/>
-          </a:ln>
-        </p:spPr>
-        <p:style>
-          <a:lnRef idx="0">
-            <a:scrgbClr r="0" g="0" b="0"/>
-          </a:lnRef>
-          <a:fillRef idx="0">
-            <a:scrgbClr r="0" g="0" b="0"/>
-          </a:fillRef>
-          <a:effectRef idx="0">
-            <a:scrgbClr r="0" g="0" b="0"/>
-          </a:effectRef>
-          <a:fontRef idx="minor"/>
-        </p:style>
-        <p:txBody>
-          <a:bodyPr lIns="90000" tIns="-44640" rIns="90000" bIns="-44640" anchor="t" anchorCtr="1">
-            <a:noAutofit/>
-          </a:bodyPr>
-          <a:lstStyle/>
-          <a:p>
-            <a:endParaRPr lang="en-US" sz="1800" b="0" u="none" strike="noStrike">
-              <a:solidFill>
-                <a:srgbClr val="000000"/>
-              </a:solidFill>
-              <a:effectLst/>
-              <a:uFillTx/>
-              <a:latin typeface="Arial"/>
-            </a:endParaRPr>
-          </a:p>
-        </p:txBody>
-      </p:sp>
-      <p:sp>
-        <p:nvSpPr>
-          <p:cNvPr id="30" name="Text 16"/>
-          <p:cNvSpPr/>
-          <p:nvPr/>
-        </p:nvSpPr>
-        <p:spPr>
-          <a:xfrm>
-            <a:off x="868680" y="5193720"/>
-            <a:ext cx="1325520" cy="228240"/>
-          </a:xfrm>
-          <a:prstGeom prst="rect">
-            <a:avLst/>
-          </a:prstGeom>
-          <a:noFill/>
-          <a:ln w="0">
-            <a:noFill/>
-          </a:ln>
-        </p:spPr>
-        <p:style>
-          <a:lnRef idx="0">
-            <a:scrgbClr r="0" g="0" b="0"/>
-          </a:lnRef>
-          <a:fillRef idx="0">
-            <a:scrgbClr r="0" g="0" b="0"/>
-          </a:fillRef>
-          <a:effectRef idx="0">
-            <a:scrgbClr r="0" g="0" b="0"/>
-          </a:effectRef>
-          <a:fontRef idx="minor"/>
-        </p:style>
-        <p:txBody>
-          <a:bodyPr lIns="0" tIns="0" rIns="0" bIns="0" anchor="ctr">
-            <a:noAutofit/>
-          </a:bodyPr>
-          <a:lstStyle/>
-          <a:p>
-            <a:pPr defTabSz="914400">
-              <a:lnSpc>
-                <a:spcPct val="100000"/>
-              </a:lnSpc>
-              <a:tabLst>
-                <a:tab pos="0" algn="l"/>
-              </a:tabLst>
-            </a:pPr>
-            <a:r>
-              <a:rPr lang="en-US" sz="1350" b="1" u="none" strike="noStrike">
-                <a:solidFill>
-                  <a:srgbClr val="586979"/>
-                </a:solidFill>
-                <a:effectLst/>
-                <a:uFillTx/>
-                <a:latin typeface="Aptos"/>
-              </a:rPr>
-              <a:t>Supervisor</a:t>
-            </a:r>
-            <a:endParaRPr lang="en-US" sz="1350" b="0" u="none" strike="noStrike">
-              <a:solidFill>
-                <a:srgbClr val="000000"/>
-              </a:solidFill>
-              <a:effectLst/>
-              <a:uFillTx/>
-              <a:latin typeface="Arial"/>
-            </a:endParaRPr>
-          </a:p>
-        </p:txBody>
-      </p:sp>
-      <p:sp>
-        <p:nvSpPr>
-          <p:cNvPr id="31" name="Shape 17"/>
-          <p:cNvSpPr/>
-          <p:nvPr/>
-        </p:nvSpPr>
-        <p:spPr>
-          <a:xfrm>
-            <a:off x="2148840" y="5412960"/>
-            <a:ext cx="3154680" cy="360"/>
-          </a:xfrm>
-          <a:prstGeom prst="line">
-            <a:avLst/>
-          </a:prstGeom>
-          <a:ln w="12600">
-            <a:solidFill>
-              <a:srgbClr val="8793A0"/>
-            </a:solidFill>
-            <a:round/>
-          </a:ln>
-        </p:spPr>
-        <p:style>
-          <a:lnRef idx="0">
-            <a:scrgbClr r="0" g="0" b="0"/>
-          </a:lnRef>
-          <a:fillRef idx="0">
-            <a:scrgbClr r="0" g="0" b="0"/>
-          </a:fillRef>
-          <a:effectRef idx="0">
-            <a:scrgbClr r="0" g="0" b="0"/>
-          </a:effectRef>
-          <a:fontRef idx="minor"/>
-        </p:style>
-        <p:txBody>
-          <a:bodyPr lIns="90000" tIns="-44640" rIns="90000" bIns="-44640" anchor="t" anchorCtr="1">
-            <a:noAutofit/>
-          </a:bodyPr>
-          <a:lstStyle/>
-          <a:p>
-            <a:endParaRPr lang="en-US" sz="1800" b="0" u="none" strike="noStrike">
-              <a:solidFill>
-                <a:srgbClr val="000000"/>
-              </a:solidFill>
-              <a:effectLst/>
-              <a:uFillTx/>
-              <a:latin typeface="Arial"/>
+            <a:endParaRPr lang="en-US" b="1" u="none" strike="noStrike">
+              <a:solidFill>
+                <a:srgbClr val="586979"/>
+              </a:solidFill>
+              <a:effectLst/>
+              <a:uFillTx/>
+              <a:latin typeface="Aptos"/>
             </a:endParaRPr>
           </a:p>
         </p:txBody>
@@ -4594,7 +4398,7 @@
               </a:solidFill>
               <a:effectLst/>
               <a:uFillTx/>
-              <a:latin typeface="Arial"/>
+              <a:latin typeface="Arial" panose="020B0604020202020204"/>
             </a:endParaRPr>
           </a:p>
         </p:txBody>
@@ -4661,7 +4465,7 @@
               </a:solidFill>
               <a:effectLst/>
               <a:uFillTx/>
-              <a:latin typeface="Arial"/>
+              <a:latin typeface="Arial" panose="020B0604020202020204"/>
             </a:endParaRPr>
           </a:p>
         </p:txBody>
@@ -4714,7 +4518,7 @@
               </a:solidFill>
               <a:effectLst/>
               <a:uFillTx/>
-              <a:latin typeface="Arial"/>
+              <a:latin typeface="Arial" panose="020B0604020202020204"/>
             </a:endParaRPr>
           </a:p>
         </p:txBody>
@@ -4781,7 +4585,7 @@
               </a:solidFill>
               <a:effectLst/>
               <a:uFillTx/>
-              <a:latin typeface="Arial"/>
+              <a:latin typeface="Arial" panose="020B0604020202020204"/>
             </a:endParaRPr>
           </a:p>
         </p:txBody>
@@ -4836,7 +4640,7 @@
               </a:solidFill>
               <a:effectLst/>
               <a:uFillTx/>
-              <a:latin typeface="Arial"/>
+              <a:latin typeface="Arial" panose="020B0604020202020204"/>
             </a:endParaRPr>
           </a:p>
         </p:txBody>
@@ -4903,7 +4707,7 @@
               </a:solidFill>
               <a:effectLst/>
               <a:uFillTx/>
-              <a:latin typeface="Arial"/>
+              <a:latin typeface="Arial" panose="020B0604020202020204"/>
             </a:endParaRPr>
           </a:p>
         </p:txBody>
@@ -4970,7 +4774,7 @@
               </a:solidFill>
               <a:effectLst/>
               <a:uFillTx/>
-              <a:latin typeface="Arial"/>
+              <a:latin typeface="Arial" panose="020B0604020202020204"/>
             </a:endParaRPr>
           </a:p>
         </p:txBody>
@@ -5021,7 +4825,7 @@
               </a:solidFill>
               <a:effectLst/>
               <a:uFillTx/>
-              <a:latin typeface="Arial"/>
+              <a:latin typeface="Arial" panose="020B0604020202020204"/>
             </a:endParaRPr>
           </a:p>
         </p:txBody>
@@ -5074,7 +4878,7 @@
               </a:solidFill>
               <a:effectLst/>
               <a:uFillTx/>
-              <a:latin typeface="Arial"/>
+              <a:latin typeface="Arial" panose="020B0604020202020204"/>
             </a:endParaRPr>
           </a:p>
         </p:txBody>
@@ -5141,7 +4945,7 @@
               </a:solidFill>
               <a:effectLst/>
               <a:uFillTx/>
-              <a:latin typeface="Arial"/>
+              <a:latin typeface="Arial" panose="020B0604020202020204"/>
             </a:endParaRPr>
           </a:p>
         </p:txBody>
@@ -5196,7 +5000,7 @@
               </a:solidFill>
               <a:effectLst/>
               <a:uFillTx/>
-              <a:latin typeface="Arial"/>
+              <a:latin typeface="Arial" panose="020B0604020202020204"/>
             </a:endParaRPr>
           </a:p>
         </p:txBody>
@@ -5263,7 +5067,7 @@
               </a:solidFill>
               <a:effectLst/>
               <a:uFillTx/>
-              <a:latin typeface="Arial"/>
+              <a:latin typeface="Arial" panose="020B0604020202020204"/>
             </a:endParaRPr>
           </a:p>
         </p:txBody>
@@ -5330,7 +5134,7 @@
               </a:solidFill>
               <a:effectLst/>
               <a:uFillTx/>
-              <a:latin typeface="Arial"/>
+              <a:latin typeface="Arial" panose="020B0604020202020204"/>
             </a:endParaRPr>
           </a:p>
         </p:txBody>
@@ -5381,7 +5185,7 @@
               </a:solidFill>
               <a:effectLst/>
               <a:uFillTx/>
-              <a:latin typeface="Arial"/>
+              <a:latin typeface="Arial" panose="020B0604020202020204"/>
             </a:endParaRPr>
           </a:p>
         </p:txBody>
@@ -5434,7 +5238,7 @@
               </a:solidFill>
               <a:effectLst/>
               <a:uFillTx/>
-              <a:latin typeface="Arial"/>
+              <a:latin typeface="Arial" panose="020B0604020202020204"/>
             </a:endParaRPr>
           </a:p>
         </p:txBody>
@@ -5501,7 +5305,7 @@
               </a:solidFill>
               <a:effectLst/>
               <a:uFillTx/>
-              <a:latin typeface="Arial"/>
+              <a:latin typeface="Arial" panose="020B0604020202020204"/>
             </a:endParaRPr>
           </a:p>
         </p:txBody>
@@ -5556,7 +5360,7 @@
               </a:solidFill>
               <a:effectLst/>
               <a:uFillTx/>
-              <a:latin typeface="Arial"/>
+              <a:latin typeface="Arial" panose="020B0604020202020204"/>
             </a:endParaRPr>
           </a:p>
         </p:txBody>
@@ -5623,7 +5427,7 @@
               </a:solidFill>
               <a:effectLst/>
               <a:uFillTx/>
-              <a:latin typeface="Arial"/>
+              <a:latin typeface="Arial" panose="020B0604020202020204"/>
             </a:endParaRPr>
           </a:p>
         </p:txBody>
@@ -5690,7 +5494,7 @@
               </a:solidFill>
               <a:effectLst/>
               <a:uFillTx/>
-              <a:latin typeface="Arial"/>
+              <a:latin typeface="Arial" panose="020B0604020202020204"/>
             </a:endParaRPr>
           </a:p>
         </p:txBody>
@@ -5741,7 +5545,7 @@
               </a:solidFill>
               <a:effectLst/>
               <a:uFillTx/>
-              <a:latin typeface="Arial"/>
+              <a:latin typeface="Arial" panose="020B0604020202020204"/>
             </a:endParaRPr>
           </a:p>
         </p:txBody>
@@ -5794,7 +5598,7 @@
               </a:solidFill>
               <a:effectLst/>
               <a:uFillTx/>
-              <a:latin typeface="Arial"/>
+              <a:latin typeface="Arial" panose="020B0604020202020204"/>
             </a:endParaRPr>
           </a:p>
         </p:txBody>
@@ -5861,7 +5665,7 @@
               </a:solidFill>
               <a:effectLst/>
               <a:uFillTx/>
-              <a:latin typeface="Arial"/>
+              <a:latin typeface="Arial" panose="020B0604020202020204"/>
             </a:endParaRPr>
           </a:p>
         </p:txBody>
@@ -5916,7 +5720,7 @@
               </a:solidFill>
               <a:effectLst/>
               <a:uFillTx/>
-              <a:latin typeface="Arial"/>
+              <a:latin typeface="Arial" panose="020B0604020202020204"/>
             </a:endParaRPr>
           </a:p>
         </p:txBody>
@@ -5983,7 +5787,7 @@
               </a:solidFill>
               <a:effectLst/>
               <a:uFillTx/>
-              <a:latin typeface="Arial"/>
+              <a:latin typeface="Arial" panose="020B0604020202020204"/>
             </a:endParaRPr>
           </a:p>
         </p:txBody>
@@ -6050,7 +5854,7 @@
               </a:solidFill>
               <a:effectLst/>
               <a:uFillTx/>
-              <a:latin typeface="Arial"/>
+              <a:latin typeface="Arial" panose="020B0604020202020204"/>
             </a:endParaRPr>
           </a:p>
         </p:txBody>
@@ -6116,7 +5920,6 @@
                 <a:latin typeface="Aptos"/>
                 <a:ea typeface="Aptos"/>
               </a:rPr>
-              <a:t>1</a:t>
             </a:fld>
             <a:endParaRPr lang="en-US" sz="900" b="0" u="none" strike="noStrike">
               <a:solidFill>
@@ -6124,7 +5927,74 @@
               </a:solidFill>
               <a:effectLst/>
               <a:uFillTx/>
-              <a:latin typeface="Times New Roman"/>
+              <a:latin typeface="Times New Roman" panose="02020603050405020304"/>
+            </a:endParaRPr>
+          </a:p>
+        </p:txBody>
+      </p:sp>
+      <p:sp>
+        <p:nvSpPr>
+          <p:cNvPr id="2" name="Text 12"/>
+          <p:cNvSpPr/>
+          <p:nvPr/>
+        </p:nvSpPr>
+        <p:spPr>
+          <a:xfrm>
+            <a:off x="868680" y="4910455"/>
+            <a:ext cx="4500880" cy="434340"/>
+          </a:xfrm>
+          <a:prstGeom prst="rect">
+            <a:avLst/>
+          </a:prstGeom>
+          <a:noFill/>
+          <a:ln w="0">
+            <a:noFill/>
+          </a:ln>
+        </p:spPr>
+        <p:style>
+          <a:lnRef idx="0">
+            <a:scrgbClr r="0" g="0" b="0"/>
+          </a:lnRef>
+          <a:fillRef idx="0">
+            <a:scrgbClr r="0" g="0" b="0"/>
+          </a:fillRef>
+          <a:effectRef idx="0">
+            <a:scrgbClr r="0" g="0" b="0"/>
+          </a:effectRef>
+          <a:fontRef idx="minor"/>
+        </p:style>
+        <p:txBody>
+          <a:bodyPr lIns="0" tIns="0" rIns="0" bIns="0" anchor="ctr">
+            <a:noAutofit/>
+          </a:bodyPr>
+          <a:lstStyle/>
+          <a:p>
+            <a:pPr defTabSz="914400">
+              <a:lnSpc>
+                <a:spcPct val="100000"/>
+              </a:lnSpc>
+              <a:tabLst>
+                <a:tab pos="0" algn="l"/>
+              </a:tabLst>
+            </a:pPr>
+            <a:r>
+              <a:rPr lang="en-US" sz="1600" b="1" u="none" strike="noStrike">
+                <a:solidFill>
+                  <a:srgbClr val="586979"/>
+                </a:solidFill>
+                <a:effectLst/>
+                <a:uFillTx/>
+                <a:latin typeface="Aptos"/>
+              </a:rPr>
+              <a:t>Student Name  :  Cao Peiqin</a:t>
+            </a:r>
+            <a:endParaRPr lang="en-US" sz="1600" b="1" u="none" strike="noStrike">
+              <a:solidFill>
+                <a:srgbClr val="586979"/>
+              </a:solidFill>
+              <a:effectLst/>
+              <a:uFillTx/>
+              <a:latin typeface="Aptos"/>
             </a:endParaRPr>
           </a:p>
         </p:txBody>
@@ -6217,7 +6087,7 @@
               </a:solidFill>
               <a:effectLst/>
               <a:uFillTx/>
-              <a:latin typeface="Arial"/>
+              <a:latin typeface="Arial" panose="020B0604020202020204"/>
             </a:endParaRPr>
           </a:p>
         </p:txBody>
@@ -6284,7 +6154,7 @@
               </a:solidFill>
               <a:effectLst/>
               <a:uFillTx/>
-              <a:latin typeface="Arial"/>
+              <a:latin typeface="Arial" panose="020B0604020202020204"/>
             </a:endParaRPr>
           </a:p>
         </p:txBody>
@@ -6346,7 +6216,7 @@
               </a:solidFill>
               <a:effectLst/>
               <a:uFillTx/>
-              <a:latin typeface="Arial"/>
+              <a:latin typeface="Arial" panose="020B0604020202020204"/>
             </a:endParaRPr>
           </a:p>
         </p:txBody>
@@ -6413,7 +6283,7 @@
               </a:solidFill>
               <a:effectLst/>
               <a:uFillTx/>
-              <a:latin typeface="Arial"/>
+              <a:latin typeface="Arial" panose="020B0604020202020204"/>
             </a:endParaRPr>
           </a:p>
         </p:txBody>
@@ -6468,7 +6338,7 @@
               </a:solidFill>
               <a:effectLst/>
               <a:uFillTx/>
-              <a:latin typeface="Arial"/>
+              <a:latin typeface="Arial" panose="020B0604020202020204"/>
             </a:endParaRPr>
           </a:p>
         </p:txBody>
@@ -6535,7 +6405,7 @@
               </a:solidFill>
               <a:effectLst/>
               <a:uFillTx/>
-              <a:latin typeface="Arial"/>
+              <a:latin typeface="Arial" panose="020B0604020202020204"/>
             </a:endParaRPr>
           </a:p>
         </p:txBody>
@@ -6602,7 +6472,7 @@
               </a:solidFill>
               <a:effectLst/>
               <a:uFillTx/>
-              <a:latin typeface="Arial"/>
+              <a:latin typeface="Arial" panose="020B0604020202020204"/>
             </a:endParaRPr>
           </a:p>
         </p:txBody>
@@ -6653,7 +6523,7 @@
               </a:solidFill>
               <a:effectLst/>
               <a:uFillTx/>
-              <a:latin typeface="Arial"/>
+              <a:latin typeface="Arial" panose="020B0604020202020204"/>
             </a:endParaRPr>
           </a:p>
         </p:txBody>
@@ -6708,7 +6578,7 @@
               </a:solidFill>
               <a:effectLst/>
               <a:uFillTx/>
-              <a:latin typeface="Arial"/>
+              <a:latin typeface="Arial" panose="020B0604020202020204"/>
             </a:endParaRPr>
           </a:p>
         </p:txBody>
@@ -6775,7 +6645,7 @@
               </a:solidFill>
               <a:effectLst/>
               <a:uFillTx/>
-              <a:latin typeface="Arial"/>
+              <a:latin typeface="Arial" panose="020B0604020202020204"/>
             </a:endParaRPr>
           </a:p>
         </p:txBody>
@@ -6842,7 +6712,7 @@
               </a:solidFill>
               <a:effectLst/>
               <a:uFillTx/>
-              <a:latin typeface="Arial"/>
+              <a:latin typeface="Arial" panose="020B0604020202020204"/>
             </a:endParaRPr>
           </a:p>
         </p:txBody>
@@ -6897,7 +6767,7 @@
               </a:solidFill>
               <a:effectLst/>
               <a:uFillTx/>
-              <a:latin typeface="Arial"/>
+              <a:latin typeface="Arial" panose="020B0604020202020204"/>
             </a:endParaRPr>
           </a:p>
         </p:txBody>
@@ -6964,7 +6834,7 @@
               </a:solidFill>
               <a:effectLst/>
               <a:uFillTx/>
-              <a:latin typeface="Arial"/>
+              <a:latin typeface="Arial" panose="020B0604020202020204"/>
             </a:endParaRPr>
           </a:p>
         </p:txBody>
@@ -7031,7 +6901,7 @@
               </a:solidFill>
               <a:effectLst/>
               <a:uFillTx/>
-              <a:latin typeface="Arial"/>
+              <a:latin typeface="Arial" panose="020B0604020202020204"/>
             </a:endParaRPr>
           </a:p>
         </p:txBody>
@@ -7086,7 +6956,7 @@
               </a:solidFill>
               <a:effectLst/>
               <a:uFillTx/>
-              <a:latin typeface="Arial"/>
+              <a:latin typeface="Arial" panose="020B0604020202020204"/>
             </a:endParaRPr>
           </a:p>
         </p:txBody>
@@ -7153,7 +7023,7 @@
               </a:solidFill>
               <a:effectLst/>
               <a:uFillTx/>
-              <a:latin typeface="Arial"/>
+              <a:latin typeface="Arial" panose="020B0604020202020204"/>
             </a:endParaRPr>
           </a:p>
         </p:txBody>
@@ -7220,7 +7090,7 @@
               </a:solidFill>
               <a:effectLst/>
               <a:uFillTx/>
-              <a:latin typeface="Arial"/>
+              <a:latin typeface="Arial" panose="020B0604020202020204"/>
             </a:endParaRPr>
           </a:p>
         </p:txBody>
@@ -7273,7 +7143,7 @@
               </a:solidFill>
               <a:effectLst/>
               <a:uFillTx/>
-              <a:latin typeface="Arial"/>
+              <a:latin typeface="Arial" panose="020B0604020202020204"/>
             </a:endParaRPr>
           </a:p>
         </p:txBody>
@@ -7340,7 +7210,7 @@
               </a:solidFill>
               <a:effectLst/>
               <a:uFillTx/>
-              <a:latin typeface="Arial"/>
+              <a:latin typeface="Arial" panose="020B0604020202020204"/>
             </a:endParaRPr>
           </a:p>
         </p:txBody>
@@ -7407,7 +7277,7 @@
               </a:solidFill>
               <a:effectLst/>
               <a:uFillTx/>
-              <a:latin typeface="Arial"/>
+              <a:latin typeface="Arial" panose="020B0604020202020204"/>
             </a:endParaRPr>
           </a:p>
         </p:txBody>
@@ -7469,7 +7339,7 @@
               </a:solidFill>
               <a:effectLst/>
               <a:uFillTx/>
-              <a:latin typeface="Arial"/>
+              <a:latin typeface="Arial" panose="020B0604020202020204"/>
             </a:endParaRPr>
           </a:p>
         </p:txBody>
@@ -7522,7 +7392,7 @@
               </a:solidFill>
               <a:effectLst/>
               <a:uFillTx/>
-              <a:latin typeface="Arial"/>
+              <a:latin typeface="Arial" panose="020B0604020202020204"/>
             </a:endParaRPr>
           </a:p>
         </p:txBody>
@@ -7589,7 +7459,7 @@
               </a:solidFill>
               <a:effectLst/>
               <a:uFillTx/>
-              <a:latin typeface="Arial"/>
+              <a:latin typeface="Arial" panose="020B0604020202020204"/>
             </a:endParaRPr>
           </a:p>
         </p:txBody>
@@ -7656,7 +7526,7 @@
               </a:solidFill>
               <a:effectLst/>
               <a:uFillTx/>
-              <a:latin typeface="Arial"/>
+              <a:latin typeface="Arial" panose="020B0604020202020204"/>
             </a:endParaRPr>
           </a:p>
         </p:txBody>
@@ -7723,7 +7593,7 @@
               </a:solidFill>
               <a:effectLst/>
               <a:uFillTx/>
-              <a:latin typeface="Arial"/>
+              <a:latin typeface="Arial" panose="020B0604020202020204"/>
             </a:endParaRPr>
           </a:p>
         </p:txBody>
@@ -7785,7 +7655,7 @@
               </a:solidFill>
               <a:effectLst/>
               <a:uFillTx/>
-              <a:latin typeface="Arial"/>
+              <a:latin typeface="Arial" panose="020B0604020202020204"/>
             </a:endParaRPr>
           </a:p>
         </p:txBody>
@@ -7838,7 +7708,7 @@
               </a:solidFill>
               <a:effectLst/>
               <a:uFillTx/>
-              <a:latin typeface="Arial"/>
+              <a:latin typeface="Arial" panose="020B0604020202020204"/>
             </a:endParaRPr>
           </a:p>
         </p:txBody>
@@ -7905,7 +7775,7 @@
               </a:solidFill>
               <a:effectLst/>
               <a:uFillTx/>
-              <a:latin typeface="Arial"/>
+              <a:latin typeface="Arial" panose="020B0604020202020204"/>
             </a:endParaRPr>
           </a:p>
         </p:txBody>
@@ -7972,7 +7842,7 @@
               </a:solidFill>
               <a:effectLst/>
               <a:uFillTx/>
-              <a:latin typeface="Arial"/>
+              <a:latin typeface="Arial" panose="020B0604020202020204"/>
             </a:endParaRPr>
           </a:p>
         </p:txBody>
@@ -8039,7 +7909,7 @@
               </a:solidFill>
               <a:effectLst/>
               <a:uFillTx/>
-              <a:latin typeface="Arial"/>
+              <a:latin typeface="Arial" panose="020B0604020202020204"/>
             </a:endParaRPr>
           </a:p>
         </p:txBody>
@@ -8101,7 +7971,7 @@
               </a:solidFill>
               <a:effectLst/>
               <a:uFillTx/>
-              <a:latin typeface="Arial"/>
+              <a:latin typeface="Arial" panose="020B0604020202020204"/>
             </a:endParaRPr>
           </a:p>
         </p:txBody>
@@ -8154,7 +8024,7 @@
               </a:solidFill>
               <a:effectLst/>
               <a:uFillTx/>
-              <a:latin typeface="Arial"/>
+              <a:latin typeface="Arial" panose="020B0604020202020204"/>
             </a:endParaRPr>
           </a:p>
         </p:txBody>
@@ -8221,7 +8091,7 @@
               </a:solidFill>
               <a:effectLst/>
               <a:uFillTx/>
-              <a:latin typeface="Arial"/>
+              <a:latin typeface="Arial" panose="020B0604020202020204"/>
             </a:endParaRPr>
           </a:p>
         </p:txBody>
@@ -8288,7 +8158,7 @@
               </a:solidFill>
               <a:effectLst/>
               <a:uFillTx/>
-              <a:latin typeface="Arial"/>
+              <a:latin typeface="Arial" panose="020B0604020202020204"/>
             </a:endParaRPr>
           </a:p>
         </p:txBody>
@@ -8355,7 +8225,7 @@
               </a:solidFill>
               <a:effectLst/>
               <a:uFillTx/>
-              <a:latin typeface="Arial"/>
+              <a:latin typeface="Arial" panose="020B0604020202020204"/>
             </a:endParaRPr>
           </a:p>
         </p:txBody>
@@ -8417,7 +8287,7 @@
               </a:solidFill>
               <a:effectLst/>
               <a:uFillTx/>
-              <a:latin typeface="Arial"/>
+              <a:latin typeface="Arial" panose="020B0604020202020204"/>
             </a:endParaRPr>
           </a:p>
         </p:txBody>
@@ -8470,7 +8340,7 @@
               </a:solidFill>
               <a:effectLst/>
               <a:uFillTx/>
-              <a:latin typeface="Arial"/>
+              <a:latin typeface="Arial" panose="020B0604020202020204"/>
             </a:endParaRPr>
           </a:p>
         </p:txBody>
@@ -8537,7 +8407,7 @@
               </a:solidFill>
               <a:effectLst/>
               <a:uFillTx/>
-              <a:latin typeface="Arial"/>
+              <a:latin typeface="Arial" panose="020B0604020202020204"/>
             </a:endParaRPr>
           </a:p>
         </p:txBody>
@@ -8604,7 +8474,7 @@
               </a:solidFill>
               <a:effectLst/>
               <a:uFillTx/>
-              <a:latin typeface="Arial"/>
+              <a:latin typeface="Arial" panose="020B0604020202020204"/>
             </a:endParaRPr>
           </a:p>
         </p:txBody>
@@ -8671,7 +8541,7 @@
               </a:solidFill>
               <a:effectLst/>
               <a:uFillTx/>
-              <a:latin typeface="Arial"/>
+              <a:latin typeface="Arial" panose="020B0604020202020204"/>
             </a:endParaRPr>
           </a:p>
         </p:txBody>
@@ -8726,7 +8596,7 @@
               </a:solidFill>
               <a:effectLst/>
               <a:uFillTx/>
-              <a:latin typeface="Arial"/>
+              <a:latin typeface="Arial" panose="020B0604020202020204"/>
             </a:endParaRPr>
           </a:p>
         </p:txBody>
@@ -8793,7 +8663,7 @@
               </a:solidFill>
               <a:effectLst/>
               <a:uFillTx/>
-              <a:latin typeface="Arial"/>
+              <a:latin typeface="Arial" panose="020B0604020202020204"/>
             </a:endParaRPr>
           </a:p>
         </p:txBody>
@@ -8859,7 +8729,6 @@
                 <a:latin typeface="Aptos"/>
                 <a:ea typeface="Aptos"/>
               </a:rPr>
-              <a:t>2</a:t>
             </a:fld>
             <a:endParaRPr lang="en-US" sz="900" b="0" u="none" strike="noStrike">
               <a:solidFill>
@@ -8867,20 +8736,14 @@
               </a:solidFill>
               <a:effectLst/>
               <a:uFillTx/>
-              <a:latin typeface="Times New Roman"/>
-            </a:endParaRPr>
-          </a:p>
-        </p:txBody>
-      </p:sp>
-      <p:sp>
-        <p:nvSpPr>
-          <p:cNvPr id="2" name="Shape 7">
-            <a:extLst>
-              <a:ext uri="{FF2B5EF4-FFF2-40B4-BE49-F238E27FC236}">
-                <a16:creationId xmlns:a16="http://schemas.microsoft.com/office/drawing/2014/main" id="{2F9DDBE0-094F-EA62-21C3-07183666522B}"/>
-              </a:ext>
-            </a:extLst>
-          </p:cNvPr>
+              <a:latin typeface="Times New Roman" panose="02020603050405020304"/>
+            </a:endParaRPr>
+          </a:p>
+        </p:txBody>
+      </p:sp>
+      <p:sp>
+        <p:nvSpPr>
+          <p:cNvPr id="2" name="Shape 7"/>
           <p:cNvSpPr/>
           <p:nvPr/>
         </p:nvSpPr>
@@ -8924,20 +8787,14 @@
               </a:solidFill>
               <a:effectLst/>
               <a:uFillTx/>
-              <a:latin typeface="Arial"/>
-            </a:endParaRPr>
-          </a:p>
-        </p:txBody>
-      </p:sp>
-      <p:sp>
-        <p:nvSpPr>
-          <p:cNvPr id="3" name="Shape 7">
-            <a:extLst>
-              <a:ext uri="{FF2B5EF4-FFF2-40B4-BE49-F238E27FC236}">
-                <a16:creationId xmlns:a16="http://schemas.microsoft.com/office/drawing/2014/main" id="{242BE9F3-6CFF-2035-8EA9-50A1BE9C350F}"/>
-              </a:ext>
-            </a:extLst>
-          </p:cNvPr>
+              <a:latin typeface="Arial" panose="020B0604020202020204"/>
+            </a:endParaRPr>
+          </a:p>
+        </p:txBody>
+      </p:sp>
+      <p:sp>
+        <p:nvSpPr>
+          <p:cNvPr id="3" name="Shape 7"/>
           <p:cNvSpPr/>
           <p:nvPr/>
         </p:nvSpPr>
@@ -8981,20 +8838,14 @@
               </a:solidFill>
               <a:effectLst/>
               <a:uFillTx/>
-              <a:latin typeface="Arial"/>
-            </a:endParaRPr>
-          </a:p>
-        </p:txBody>
-      </p:sp>
-      <p:sp>
-        <p:nvSpPr>
-          <p:cNvPr id="4" name="Shape 7">
-            <a:extLst>
-              <a:ext uri="{FF2B5EF4-FFF2-40B4-BE49-F238E27FC236}">
-                <a16:creationId xmlns:a16="http://schemas.microsoft.com/office/drawing/2014/main" id="{C602EF95-6495-3237-1E02-3231D63E57AC}"/>
-              </a:ext>
-            </a:extLst>
-          </p:cNvPr>
+              <a:latin typeface="Arial" panose="020B0604020202020204"/>
+            </a:endParaRPr>
+          </a:p>
+        </p:txBody>
+      </p:sp>
+      <p:sp>
+        <p:nvSpPr>
+          <p:cNvPr id="4" name="Shape 7"/>
           <p:cNvSpPr/>
           <p:nvPr/>
         </p:nvSpPr>
@@ -9038,7 +8889,7 @@
               </a:solidFill>
               <a:effectLst/>
               <a:uFillTx/>
-              <a:latin typeface="Arial"/>
+              <a:latin typeface="Arial" panose="020B0604020202020204"/>
             </a:endParaRPr>
           </a:p>
         </p:txBody>
@@ -9131,7 +8982,7 @@
               </a:solidFill>
               <a:effectLst/>
               <a:uFillTx/>
-              <a:latin typeface="Arial"/>
+              <a:latin typeface="Arial" panose="020B0604020202020204"/>
             </a:endParaRPr>
           </a:p>
         </p:txBody>
@@ -9198,7 +9049,7 @@
               </a:solidFill>
               <a:effectLst/>
               <a:uFillTx/>
-              <a:latin typeface="Arial"/>
+              <a:latin typeface="Arial" panose="020B0604020202020204"/>
             </a:endParaRPr>
           </a:p>
         </p:txBody>
@@ -9260,7 +9111,7 @@
               </a:solidFill>
               <a:effectLst/>
               <a:uFillTx/>
-              <a:latin typeface="Arial"/>
+              <a:latin typeface="Arial" panose="020B0604020202020204"/>
             </a:endParaRPr>
           </a:p>
         </p:txBody>
@@ -9313,7 +9164,7 @@
               </a:solidFill>
               <a:effectLst/>
               <a:uFillTx/>
-              <a:latin typeface="Arial"/>
+              <a:latin typeface="Arial" panose="020B0604020202020204"/>
             </a:endParaRPr>
           </a:p>
         </p:txBody>
@@ -9380,7 +9231,7 @@
               </a:solidFill>
               <a:effectLst/>
               <a:uFillTx/>
-              <a:latin typeface="Arial"/>
+              <a:latin typeface="Arial" panose="020B0604020202020204"/>
             </a:endParaRPr>
           </a:p>
         </p:txBody>
@@ -9435,7 +9286,7 @@
               </a:solidFill>
               <a:effectLst/>
               <a:uFillTx/>
-              <a:latin typeface="Arial"/>
+              <a:latin typeface="Arial" panose="020B0604020202020204"/>
             </a:endParaRPr>
           </a:p>
         </p:txBody>
@@ -9502,7 +9353,7 @@
               </a:solidFill>
               <a:effectLst/>
               <a:uFillTx/>
-              <a:latin typeface="Arial"/>
+              <a:latin typeface="Arial" panose="020B0604020202020204"/>
             </a:endParaRPr>
           </a:p>
         </p:txBody>
@@ -9569,7 +9420,7 @@
               </a:solidFill>
               <a:effectLst/>
               <a:uFillTx/>
-              <a:latin typeface="Arial"/>
+              <a:latin typeface="Arial" panose="020B0604020202020204"/>
             </a:endParaRPr>
           </a:p>
         </p:txBody>
@@ -9624,7 +9475,7 @@
               </a:solidFill>
               <a:effectLst/>
               <a:uFillTx/>
-              <a:latin typeface="Arial"/>
+              <a:latin typeface="Arial" panose="020B0604020202020204"/>
             </a:endParaRPr>
           </a:p>
         </p:txBody>
@@ -9691,7 +9542,7 @@
               </a:solidFill>
               <a:effectLst/>
               <a:uFillTx/>
-              <a:latin typeface="Arial"/>
+              <a:latin typeface="Arial" panose="020B0604020202020204"/>
             </a:endParaRPr>
           </a:p>
         </p:txBody>
@@ -9758,7 +9609,7 @@
               </a:solidFill>
               <a:effectLst/>
               <a:uFillTx/>
-              <a:latin typeface="Arial"/>
+              <a:latin typeface="Arial" panose="020B0604020202020204"/>
             </a:endParaRPr>
           </a:p>
         </p:txBody>
@@ -9820,7 +9671,7 @@
               </a:solidFill>
               <a:effectLst/>
               <a:uFillTx/>
-              <a:latin typeface="Arial"/>
+              <a:latin typeface="Arial" panose="020B0604020202020204"/>
             </a:endParaRPr>
           </a:p>
         </p:txBody>
@@ -9873,7 +9724,7 @@
               </a:solidFill>
               <a:effectLst/>
               <a:uFillTx/>
-              <a:latin typeface="Arial"/>
+              <a:latin typeface="Arial" panose="020B0604020202020204"/>
             </a:endParaRPr>
           </a:p>
         </p:txBody>
@@ -9940,7 +9791,7 @@
               </a:solidFill>
               <a:effectLst/>
               <a:uFillTx/>
-              <a:latin typeface="Arial"/>
+              <a:latin typeface="Arial" panose="020B0604020202020204"/>
             </a:endParaRPr>
           </a:p>
         </p:txBody>
@@ -9995,7 +9846,7 @@
               </a:solidFill>
               <a:effectLst/>
               <a:uFillTx/>
-              <a:latin typeface="Arial"/>
+              <a:latin typeface="Arial" panose="020B0604020202020204"/>
             </a:endParaRPr>
           </a:p>
         </p:txBody>
@@ -10062,7 +9913,7 @@
               </a:solidFill>
               <a:effectLst/>
               <a:uFillTx/>
-              <a:latin typeface="Arial"/>
+              <a:latin typeface="Arial" panose="020B0604020202020204"/>
             </a:endParaRPr>
           </a:p>
         </p:txBody>
@@ -10129,7 +9980,7 @@
               </a:solidFill>
               <a:effectLst/>
               <a:uFillTx/>
-              <a:latin typeface="Arial"/>
+              <a:latin typeface="Arial" panose="020B0604020202020204"/>
             </a:endParaRPr>
           </a:p>
         </p:txBody>
@@ -10184,7 +10035,7 @@
               </a:solidFill>
               <a:effectLst/>
               <a:uFillTx/>
-              <a:latin typeface="Arial"/>
+              <a:latin typeface="Arial" panose="020B0604020202020204"/>
             </a:endParaRPr>
           </a:p>
         </p:txBody>
@@ -10251,7 +10102,7 @@
               </a:solidFill>
               <a:effectLst/>
               <a:uFillTx/>
-              <a:latin typeface="Arial"/>
+              <a:latin typeface="Arial" panose="020B0604020202020204"/>
             </a:endParaRPr>
           </a:p>
         </p:txBody>
@@ -10318,7 +10169,7 @@
               </a:solidFill>
               <a:effectLst/>
               <a:uFillTx/>
-              <a:latin typeface="Arial"/>
+              <a:latin typeface="Arial" panose="020B0604020202020204"/>
             </a:endParaRPr>
           </a:p>
         </p:txBody>
@@ -10380,7 +10231,7 @@
               </a:solidFill>
               <a:effectLst/>
               <a:uFillTx/>
-              <a:latin typeface="Arial"/>
+              <a:latin typeface="Arial" panose="020B0604020202020204"/>
             </a:endParaRPr>
           </a:p>
         </p:txBody>
@@ -10433,7 +10284,7 @@
               </a:solidFill>
               <a:effectLst/>
               <a:uFillTx/>
-              <a:latin typeface="Arial"/>
+              <a:latin typeface="Arial" panose="020B0604020202020204"/>
             </a:endParaRPr>
           </a:p>
         </p:txBody>
@@ -10500,7 +10351,7 @@
               </a:solidFill>
               <a:effectLst/>
               <a:uFillTx/>
-              <a:latin typeface="Arial"/>
+              <a:latin typeface="Arial" panose="020B0604020202020204"/>
             </a:endParaRPr>
           </a:p>
         </p:txBody>
@@ -10555,7 +10406,7 @@
               </a:solidFill>
               <a:effectLst/>
               <a:uFillTx/>
-              <a:latin typeface="Arial"/>
+              <a:latin typeface="Arial" panose="020B0604020202020204"/>
             </a:endParaRPr>
           </a:p>
         </p:txBody>
@@ -10622,7 +10473,7 @@
               </a:solidFill>
               <a:effectLst/>
               <a:uFillTx/>
-              <a:latin typeface="Arial"/>
+              <a:latin typeface="Arial" panose="020B0604020202020204"/>
             </a:endParaRPr>
           </a:p>
         </p:txBody>
@@ -10689,7 +10540,7 @@
               </a:solidFill>
               <a:effectLst/>
               <a:uFillTx/>
-              <a:latin typeface="Arial"/>
+              <a:latin typeface="Arial" panose="020B0604020202020204"/>
             </a:endParaRPr>
           </a:p>
         </p:txBody>
@@ -10744,7 +10595,7 @@
               </a:solidFill>
               <a:effectLst/>
               <a:uFillTx/>
-              <a:latin typeface="Arial"/>
+              <a:latin typeface="Arial" panose="020B0604020202020204"/>
             </a:endParaRPr>
           </a:p>
         </p:txBody>
@@ -10811,7 +10662,7 @@
               </a:solidFill>
               <a:effectLst/>
               <a:uFillTx/>
-              <a:latin typeface="Arial"/>
+              <a:latin typeface="Arial" panose="020B0604020202020204"/>
             </a:endParaRPr>
           </a:p>
         </p:txBody>
@@ -10878,7 +10729,7 @@
               </a:solidFill>
               <a:effectLst/>
               <a:uFillTx/>
-              <a:latin typeface="Arial"/>
+              <a:latin typeface="Arial" panose="020B0604020202020204"/>
             </a:endParaRPr>
           </a:p>
         </p:txBody>
@@ -10940,7 +10791,7 @@
               </a:solidFill>
               <a:effectLst/>
               <a:uFillTx/>
-              <a:latin typeface="Arial"/>
+              <a:latin typeface="Arial" panose="020B0604020202020204"/>
             </a:endParaRPr>
           </a:p>
         </p:txBody>
@@ -10993,7 +10844,7 @@
               </a:solidFill>
               <a:effectLst/>
               <a:uFillTx/>
-              <a:latin typeface="Arial"/>
+              <a:latin typeface="Arial" panose="020B0604020202020204"/>
             </a:endParaRPr>
           </a:p>
         </p:txBody>
@@ -11060,7 +10911,7 @@
               </a:solidFill>
               <a:effectLst/>
               <a:uFillTx/>
-              <a:latin typeface="Arial"/>
+              <a:latin typeface="Arial" panose="020B0604020202020204"/>
             </a:endParaRPr>
           </a:p>
         </p:txBody>
@@ -11115,7 +10966,7 @@
               </a:solidFill>
               <a:effectLst/>
               <a:uFillTx/>
-              <a:latin typeface="Arial"/>
+              <a:latin typeface="Arial" panose="020B0604020202020204"/>
             </a:endParaRPr>
           </a:p>
         </p:txBody>
@@ -11182,7 +11033,7 @@
               </a:solidFill>
               <a:effectLst/>
               <a:uFillTx/>
-              <a:latin typeface="Arial"/>
+              <a:latin typeface="Arial" panose="020B0604020202020204"/>
             </a:endParaRPr>
           </a:p>
         </p:txBody>
@@ -11249,7 +11100,7 @@
               </a:solidFill>
               <a:effectLst/>
               <a:uFillTx/>
-              <a:latin typeface="Arial"/>
+              <a:latin typeface="Arial" panose="020B0604020202020204"/>
             </a:endParaRPr>
           </a:p>
         </p:txBody>
@@ -11304,7 +11155,7 @@
               </a:solidFill>
               <a:effectLst/>
               <a:uFillTx/>
-              <a:latin typeface="Arial"/>
+              <a:latin typeface="Arial" panose="020B0604020202020204"/>
             </a:endParaRPr>
           </a:p>
         </p:txBody>
@@ -11371,7 +11222,7 @@
               </a:solidFill>
               <a:effectLst/>
               <a:uFillTx/>
-              <a:latin typeface="Arial"/>
+              <a:latin typeface="Arial" panose="020B0604020202020204"/>
             </a:endParaRPr>
           </a:p>
         </p:txBody>
@@ -11438,7 +11289,7 @@
               </a:solidFill>
               <a:effectLst/>
               <a:uFillTx/>
-              <a:latin typeface="Arial"/>
+              <a:latin typeface="Arial" panose="020B0604020202020204"/>
             </a:endParaRPr>
           </a:p>
         </p:txBody>
@@ -11500,7 +11351,7 @@
               </a:solidFill>
               <a:effectLst/>
               <a:uFillTx/>
-              <a:latin typeface="Arial"/>
+              <a:latin typeface="Arial" panose="020B0604020202020204"/>
             </a:endParaRPr>
           </a:p>
         </p:txBody>
@@ -11553,7 +11404,7 @@
               </a:solidFill>
               <a:effectLst/>
               <a:uFillTx/>
-              <a:latin typeface="Arial"/>
+              <a:latin typeface="Arial" panose="020B0604020202020204"/>
             </a:endParaRPr>
           </a:p>
         </p:txBody>
@@ -11620,7 +11471,7 @@
               </a:solidFill>
               <a:effectLst/>
               <a:uFillTx/>
-              <a:latin typeface="Arial"/>
+              <a:latin typeface="Arial" panose="020B0604020202020204"/>
             </a:endParaRPr>
           </a:p>
         </p:txBody>
@@ -11675,7 +11526,7 @@
               </a:solidFill>
               <a:effectLst/>
               <a:uFillTx/>
-              <a:latin typeface="Arial"/>
+              <a:latin typeface="Arial" panose="020B0604020202020204"/>
             </a:endParaRPr>
           </a:p>
         </p:txBody>
@@ -11742,7 +11593,7 @@
               </a:solidFill>
               <a:effectLst/>
               <a:uFillTx/>
-              <a:latin typeface="Arial"/>
+              <a:latin typeface="Arial" panose="020B0604020202020204"/>
             </a:endParaRPr>
           </a:p>
         </p:txBody>
@@ -11809,7 +11660,7 @@
               </a:solidFill>
               <a:effectLst/>
               <a:uFillTx/>
-              <a:latin typeface="Arial"/>
+              <a:latin typeface="Arial" panose="020B0604020202020204"/>
             </a:endParaRPr>
           </a:p>
         </p:txBody>
@@ -11864,7 +11715,7 @@
               </a:solidFill>
               <a:effectLst/>
               <a:uFillTx/>
-              <a:latin typeface="Arial"/>
+              <a:latin typeface="Arial" panose="020B0604020202020204"/>
             </a:endParaRPr>
           </a:p>
         </p:txBody>
@@ -11931,7 +11782,7 @@
               </a:solidFill>
               <a:effectLst/>
               <a:uFillTx/>
-              <a:latin typeface="Arial"/>
+              <a:latin typeface="Arial" panose="020B0604020202020204"/>
             </a:endParaRPr>
           </a:p>
         </p:txBody>
@@ -11998,7 +11849,7 @@
               </a:solidFill>
               <a:effectLst/>
               <a:uFillTx/>
-              <a:latin typeface="Arial"/>
+              <a:latin typeface="Arial" panose="020B0604020202020204"/>
             </a:endParaRPr>
           </a:p>
         </p:txBody>
@@ -12053,7 +11904,7 @@
               </a:solidFill>
               <a:effectLst/>
               <a:uFillTx/>
-              <a:latin typeface="Arial"/>
+              <a:latin typeface="Arial" panose="020B0604020202020204"/>
             </a:endParaRPr>
           </a:p>
         </p:txBody>
@@ -12120,7 +11971,7 @@
               </a:solidFill>
               <a:effectLst/>
               <a:uFillTx/>
-              <a:latin typeface="Arial"/>
+              <a:latin typeface="Arial" panose="020B0604020202020204"/>
             </a:endParaRPr>
           </a:p>
         </p:txBody>
@@ -12175,7 +12026,7 @@
               </a:solidFill>
               <a:effectLst/>
               <a:uFillTx/>
-              <a:latin typeface="Arial"/>
+              <a:latin typeface="Arial" panose="020B0604020202020204"/>
             </a:endParaRPr>
           </a:p>
         </p:txBody>
@@ -12242,7 +12093,7 @@
               </a:solidFill>
               <a:effectLst/>
               <a:uFillTx/>
-              <a:latin typeface="Arial"/>
+              <a:latin typeface="Arial" panose="020B0604020202020204"/>
             </a:endParaRPr>
           </a:p>
         </p:txBody>
@@ -12297,7 +12148,7 @@
               </a:solidFill>
               <a:effectLst/>
               <a:uFillTx/>
-              <a:latin typeface="Arial"/>
+              <a:latin typeface="Arial" panose="020B0604020202020204"/>
             </a:endParaRPr>
           </a:p>
         </p:txBody>
@@ -12364,7 +12215,7 @@
               </a:solidFill>
               <a:effectLst/>
               <a:uFillTx/>
-              <a:latin typeface="Arial"/>
+              <a:latin typeface="Arial" panose="020B0604020202020204"/>
             </a:endParaRPr>
           </a:p>
         </p:txBody>
@@ -12419,7 +12270,7 @@
               </a:solidFill>
               <a:effectLst/>
               <a:uFillTx/>
-              <a:latin typeface="Arial"/>
+              <a:latin typeface="Arial" panose="020B0604020202020204"/>
             </a:endParaRPr>
           </a:p>
         </p:txBody>
@@ -12486,7 +12337,7 @@
               </a:solidFill>
               <a:effectLst/>
               <a:uFillTx/>
-              <a:latin typeface="Arial"/>
+              <a:latin typeface="Arial" panose="020B0604020202020204"/>
             </a:endParaRPr>
           </a:p>
         </p:txBody>
@@ -12541,7 +12392,7 @@
               </a:solidFill>
               <a:effectLst/>
               <a:uFillTx/>
-              <a:latin typeface="Arial"/>
+              <a:latin typeface="Arial" panose="020B0604020202020204"/>
             </a:endParaRPr>
           </a:p>
         </p:txBody>
@@ -12608,7 +12459,7 @@
               </a:solidFill>
               <a:effectLst/>
               <a:uFillTx/>
-              <a:latin typeface="Arial"/>
+              <a:latin typeface="Arial" panose="020B0604020202020204"/>
             </a:endParaRPr>
           </a:p>
         </p:txBody>
@@ -12663,7 +12514,7 @@
               </a:solidFill>
               <a:effectLst/>
               <a:uFillTx/>
-              <a:latin typeface="Arial"/>
+              <a:latin typeface="Arial" panose="020B0604020202020204"/>
             </a:endParaRPr>
           </a:p>
         </p:txBody>
@@ -12730,7 +12581,7 @@
               </a:solidFill>
               <a:effectLst/>
               <a:uFillTx/>
-              <a:latin typeface="Arial"/>
+              <a:latin typeface="Arial" panose="020B0604020202020204"/>
             </a:endParaRPr>
           </a:p>
         </p:txBody>
@@ -12797,7 +12648,7 @@
               </a:solidFill>
               <a:effectLst/>
               <a:uFillTx/>
-              <a:latin typeface="Arial"/>
+              <a:latin typeface="Arial" panose="020B0604020202020204"/>
             </a:endParaRPr>
           </a:p>
         </p:txBody>
@@ -12863,7 +12714,6 @@
                 <a:latin typeface="Aptos"/>
                 <a:ea typeface="Aptos"/>
               </a:rPr>
-              <a:t>3</a:t>
             </a:fld>
             <a:endParaRPr lang="en-US" sz="900" b="0" u="none" strike="noStrike">
               <a:solidFill>
@@ -12871,7 +12721,7 @@
               </a:solidFill>
               <a:effectLst/>
               <a:uFillTx/>
-              <a:latin typeface="Times New Roman"/>
+              <a:latin typeface="Times New Roman" panose="02020603050405020304"/>
             </a:endParaRPr>
           </a:p>
         </p:txBody>
@@ -12964,7 +12814,7 @@
               </a:solidFill>
               <a:effectLst/>
               <a:uFillTx/>
-              <a:latin typeface="Arial"/>
+              <a:latin typeface="Arial" panose="020B0604020202020204"/>
             </a:endParaRPr>
           </a:p>
         </p:txBody>
@@ -13031,7 +12881,7 @@
               </a:solidFill>
               <a:effectLst/>
               <a:uFillTx/>
-              <a:latin typeface="Arial"/>
+              <a:latin typeface="Arial" panose="020B0604020202020204"/>
             </a:endParaRPr>
           </a:p>
         </p:txBody>
@@ -13093,7 +12943,7 @@
               </a:solidFill>
               <a:effectLst/>
               <a:uFillTx/>
-              <a:latin typeface="Arial"/>
+              <a:latin typeface="Arial" panose="020B0604020202020204"/>
             </a:endParaRPr>
           </a:p>
         </p:txBody>
@@ -13148,7 +12998,7 @@
               </a:solidFill>
               <a:effectLst/>
               <a:uFillTx/>
-              <a:latin typeface="Arial"/>
+              <a:latin typeface="Arial" panose="020B0604020202020204"/>
             </a:endParaRPr>
           </a:p>
         </p:txBody>
@@ -13215,7 +13065,7 @@
               </a:solidFill>
               <a:effectLst/>
               <a:uFillTx/>
-              <a:latin typeface="Arial"/>
+              <a:latin typeface="Arial" panose="020B0604020202020204"/>
             </a:endParaRPr>
           </a:p>
         </p:txBody>
@@ -13268,7 +13118,7 @@
               </a:solidFill>
               <a:effectLst/>
               <a:uFillTx/>
-              <a:latin typeface="Arial"/>
+              <a:latin typeface="Arial" panose="020B0604020202020204"/>
             </a:endParaRPr>
           </a:p>
         </p:txBody>
@@ -13335,7 +13185,7 @@
               </a:solidFill>
               <a:effectLst/>
               <a:uFillTx/>
-              <a:latin typeface="Arial"/>
+              <a:latin typeface="Arial" panose="020B0604020202020204"/>
             </a:endParaRPr>
           </a:p>
         </p:txBody>
@@ -13402,7 +13252,7 @@
               </a:solidFill>
               <a:effectLst/>
               <a:uFillTx/>
-              <a:latin typeface="Arial"/>
+              <a:latin typeface="Arial" panose="020B0604020202020204"/>
             </a:endParaRPr>
           </a:p>
         </p:txBody>
@@ -13455,7 +13305,7 @@
               </a:solidFill>
               <a:effectLst/>
               <a:uFillTx/>
-              <a:latin typeface="Arial"/>
+              <a:latin typeface="Arial" panose="020B0604020202020204"/>
             </a:endParaRPr>
           </a:p>
         </p:txBody>
@@ -13522,7 +13372,7 @@
               </a:solidFill>
               <a:effectLst/>
               <a:uFillTx/>
-              <a:latin typeface="Arial"/>
+              <a:latin typeface="Arial" panose="020B0604020202020204"/>
             </a:endParaRPr>
           </a:p>
         </p:txBody>
@@ -13589,7 +13439,7 @@
               </a:solidFill>
               <a:effectLst/>
               <a:uFillTx/>
-              <a:latin typeface="Arial"/>
+              <a:latin typeface="Arial" panose="020B0604020202020204"/>
             </a:endParaRPr>
           </a:p>
         </p:txBody>
@@ -13642,7 +13492,7 @@
               </a:solidFill>
               <a:effectLst/>
               <a:uFillTx/>
-              <a:latin typeface="Arial"/>
+              <a:latin typeface="Arial" panose="020B0604020202020204"/>
             </a:endParaRPr>
           </a:p>
         </p:txBody>
@@ -13709,7 +13559,7 @@
               </a:solidFill>
               <a:effectLst/>
               <a:uFillTx/>
-              <a:latin typeface="Arial"/>
+              <a:latin typeface="Arial" panose="020B0604020202020204"/>
             </a:endParaRPr>
           </a:p>
         </p:txBody>
@@ -13776,7 +13626,7 @@
               </a:solidFill>
               <a:effectLst/>
               <a:uFillTx/>
-              <a:latin typeface="Arial"/>
+              <a:latin typeface="Arial" panose="020B0604020202020204"/>
             </a:endParaRPr>
           </a:p>
         </p:txBody>
@@ -13829,7 +13679,7 @@
               </a:solidFill>
               <a:effectLst/>
               <a:uFillTx/>
-              <a:latin typeface="Arial"/>
+              <a:latin typeface="Arial" panose="020B0604020202020204"/>
             </a:endParaRPr>
           </a:p>
         </p:txBody>
@@ -13896,7 +13746,7 @@
               </a:solidFill>
               <a:effectLst/>
               <a:uFillTx/>
-              <a:latin typeface="Arial"/>
+              <a:latin typeface="Arial" panose="020B0604020202020204"/>
             </a:endParaRPr>
           </a:p>
         </p:txBody>
@@ -13963,7 +13813,7 @@
               </a:solidFill>
               <a:effectLst/>
               <a:uFillTx/>
-              <a:latin typeface="Arial"/>
+              <a:latin typeface="Arial" panose="020B0604020202020204"/>
             </a:endParaRPr>
           </a:p>
         </p:txBody>
@@ -14018,7 +13868,7 @@
               </a:solidFill>
               <a:effectLst/>
               <a:uFillTx/>
-              <a:latin typeface="Arial"/>
+              <a:latin typeface="Arial" panose="020B0604020202020204"/>
             </a:endParaRPr>
           </a:p>
         </p:txBody>
@@ -14085,7 +13935,7 @@
               </a:solidFill>
               <a:effectLst/>
               <a:uFillTx/>
-              <a:latin typeface="Arial"/>
+              <a:latin typeface="Arial" panose="020B0604020202020204"/>
             </a:endParaRPr>
           </a:p>
         </p:txBody>
@@ -14140,7 +13990,7 @@
               </a:solidFill>
               <a:effectLst/>
               <a:uFillTx/>
-              <a:latin typeface="Arial"/>
+              <a:latin typeface="Arial" panose="020B0604020202020204"/>
             </a:endParaRPr>
           </a:p>
         </p:txBody>
@@ -14207,7 +14057,7 @@
               </a:solidFill>
               <a:effectLst/>
               <a:uFillTx/>
-              <a:latin typeface="Arial"/>
+              <a:latin typeface="Arial" panose="020B0604020202020204"/>
             </a:endParaRPr>
           </a:p>
         </p:txBody>
@@ -14262,7 +14112,7 @@
               </a:solidFill>
               <a:effectLst/>
               <a:uFillTx/>
-              <a:latin typeface="Arial"/>
+              <a:latin typeface="Arial" panose="020B0604020202020204"/>
             </a:endParaRPr>
           </a:p>
         </p:txBody>
@@ -14329,7 +14179,7 @@
               </a:solidFill>
               <a:effectLst/>
               <a:uFillTx/>
-              <a:latin typeface="Arial"/>
+              <a:latin typeface="Arial" panose="020B0604020202020204"/>
             </a:endParaRPr>
           </a:p>
         </p:txBody>
@@ -14384,7 +14234,7 @@
               </a:solidFill>
               <a:effectLst/>
               <a:uFillTx/>
-              <a:latin typeface="Arial"/>
+              <a:latin typeface="Arial" panose="020B0604020202020204"/>
             </a:endParaRPr>
           </a:p>
         </p:txBody>
@@ -14451,7 +14301,7 @@
               </a:solidFill>
               <a:effectLst/>
               <a:uFillTx/>
-              <a:latin typeface="Arial"/>
+              <a:latin typeface="Arial" panose="020B0604020202020204"/>
             </a:endParaRPr>
           </a:p>
         </p:txBody>
@@ -14506,7 +14356,7 @@
               </a:solidFill>
               <a:effectLst/>
               <a:uFillTx/>
-              <a:latin typeface="Arial"/>
+              <a:latin typeface="Arial" panose="020B0604020202020204"/>
             </a:endParaRPr>
           </a:p>
         </p:txBody>
@@ -14573,7 +14423,7 @@
               </a:solidFill>
               <a:effectLst/>
               <a:uFillTx/>
-              <a:latin typeface="Arial"/>
+              <a:latin typeface="Arial" panose="020B0604020202020204"/>
             </a:endParaRPr>
           </a:p>
         </p:txBody>
@@ -14628,7 +14478,7 @@
               </a:solidFill>
               <a:effectLst/>
               <a:uFillTx/>
-              <a:latin typeface="Arial"/>
+              <a:latin typeface="Arial" panose="020B0604020202020204"/>
             </a:endParaRPr>
           </a:p>
         </p:txBody>
@@ -14695,7 +14545,7 @@
               </a:solidFill>
               <a:effectLst/>
               <a:uFillTx/>
-              <a:latin typeface="Arial"/>
+              <a:latin typeface="Arial" panose="020B0604020202020204"/>
             </a:endParaRPr>
           </a:p>
         </p:txBody>
@@ -14750,7 +14600,7 @@
               </a:solidFill>
               <a:effectLst/>
               <a:uFillTx/>
-              <a:latin typeface="Arial"/>
+              <a:latin typeface="Arial" panose="020B0604020202020204"/>
             </a:endParaRPr>
           </a:p>
         </p:txBody>
@@ -14817,7 +14667,7 @@
               </a:solidFill>
               <a:effectLst/>
               <a:uFillTx/>
-              <a:latin typeface="Arial"/>
+              <a:latin typeface="Arial" panose="020B0604020202020204"/>
             </a:endParaRPr>
           </a:p>
         </p:txBody>
@@ -14879,7 +14729,7 @@
               </a:solidFill>
               <a:effectLst/>
               <a:uFillTx/>
-              <a:latin typeface="Arial"/>
+              <a:latin typeface="Arial" panose="020B0604020202020204"/>
             </a:endParaRPr>
           </a:p>
         </p:txBody>
@@ -14946,7 +14796,7 @@
               </a:solidFill>
               <a:effectLst/>
               <a:uFillTx/>
-              <a:latin typeface="Arial"/>
+              <a:latin typeface="Arial" panose="020B0604020202020204"/>
             </a:endParaRPr>
           </a:p>
         </p:txBody>
@@ -14958,7 +14808,7 @@
           <p:nvPr/>
         </p:nvPicPr>
         <p:blipFill>
-          <a:blip r:embed="rId3"/>
+          <a:blip r:embed="rId1"/>
           <a:srcRect l="16817" r="16529" b="6292"/>
           <a:stretch>
             <a:fillRect/>
@@ -15028,7 +14878,7 @@
               </a:solidFill>
               <a:effectLst/>
               <a:uFillTx/>
-              <a:latin typeface="Arial"/>
+              <a:latin typeface="Arial" panose="020B0604020202020204"/>
             </a:endParaRPr>
           </a:p>
         </p:txBody>
@@ -15095,7 +14945,7 @@
               </a:solidFill>
               <a:effectLst/>
               <a:uFillTx/>
-              <a:latin typeface="Arial"/>
+              <a:latin typeface="Arial" panose="020B0604020202020204"/>
             </a:endParaRPr>
           </a:p>
         </p:txBody>
@@ -15161,7 +15011,6 @@
                 <a:latin typeface="Aptos"/>
                 <a:ea typeface="Aptos"/>
               </a:rPr>
-              <a:t>4</a:t>
             </a:fld>
             <a:endParaRPr lang="en-US" sz="900" b="0" u="none" strike="noStrike">
               <a:solidFill>
@@ -15169,7 +15018,7 @@
               </a:solidFill>
               <a:effectLst/>
               <a:uFillTx/>
-              <a:latin typeface="Times New Roman"/>
+              <a:latin typeface="Times New Roman" panose="02020603050405020304"/>
             </a:endParaRPr>
           </a:p>
         </p:txBody>
@@ -15262,7 +15111,7 @@
               </a:solidFill>
               <a:effectLst/>
               <a:uFillTx/>
-              <a:latin typeface="Arial"/>
+              <a:latin typeface="Arial" panose="020B0604020202020204"/>
             </a:endParaRPr>
           </a:p>
         </p:txBody>
@@ -15329,7 +15178,7 @@
               </a:solidFill>
               <a:effectLst/>
               <a:uFillTx/>
-              <a:latin typeface="Arial"/>
+              <a:latin typeface="Arial" panose="020B0604020202020204"/>
             </a:endParaRPr>
           </a:p>
         </p:txBody>
@@ -15391,7 +15240,7 @@
               </a:solidFill>
               <a:effectLst/>
               <a:uFillTx/>
-              <a:latin typeface="Arial"/>
+              <a:latin typeface="Arial" panose="020B0604020202020204"/>
             </a:endParaRPr>
           </a:p>
         </p:txBody>
@@ -15458,7 +15307,7 @@
               </a:solidFill>
               <a:effectLst/>
               <a:uFillTx/>
-              <a:latin typeface="Arial"/>
+              <a:latin typeface="Arial" panose="020B0604020202020204"/>
             </a:endParaRPr>
           </a:p>
         </p:txBody>
@@ -15525,7 +15374,7 @@
               </a:solidFill>
               <a:effectLst/>
               <a:uFillTx/>
-              <a:latin typeface="Arial"/>
+              <a:latin typeface="Arial" panose="020B0604020202020204"/>
             </a:endParaRPr>
           </a:p>
         </p:txBody>
@@ -15587,7 +15436,7 @@
               </a:solidFill>
               <a:effectLst/>
               <a:uFillTx/>
-              <a:latin typeface="Arial"/>
+              <a:latin typeface="Arial" panose="020B0604020202020204"/>
             </a:endParaRPr>
           </a:p>
         </p:txBody>
@@ -15654,7 +15503,7 @@
               </a:solidFill>
               <a:effectLst/>
               <a:uFillTx/>
-              <a:latin typeface="Arial"/>
+              <a:latin typeface="Arial" panose="020B0604020202020204"/>
             </a:endParaRPr>
           </a:p>
         </p:txBody>
@@ -15721,7 +15570,7 @@
               </a:solidFill>
               <a:effectLst/>
               <a:uFillTx/>
-              <a:latin typeface="Arial"/>
+              <a:latin typeface="Arial" panose="020B0604020202020204"/>
             </a:endParaRPr>
           </a:p>
         </p:txBody>
@@ -15783,7 +15632,7 @@
               </a:solidFill>
               <a:effectLst/>
               <a:uFillTx/>
-              <a:latin typeface="Arial"/>
+              <a:latin typeface="Arial" panose="020B0604020202020204"/>
             </a:endParaRPr>
           </a:p>
         </p:txBody>
@@ -15850,7 +15699,7 @@
               </a:solidFill>
               <a:effectLst/>
               <a:uFillTx/>
-              <a:latin typeface="Arial"/>
+              <a:latin typeface="Arial" panose="020B0604020202020204"/>
             </a:endParaRPr>
           </a:p>
         </p:txBody>
@@ -15917,7 +15766,7 @@
               </a:solidFill>
               <a:effectLst/>
               <a:uFillTx/>
-              <a:latin typeface="Arial"/>
+              <a:latin typeface="Arial" panose="020B0604020202020204"/>
             </a:endParaRPr>
           </a:p>
         </p:txBody>
@@ -15979,7 +15828,7 @@
               </a:solidFill>
               <a:effectLst/>
               <a:uFillTx/>
-              <a:latin typeface="Arial"/>
+              <a:latin typeface="Arial" panose="020B0604020202020204"/>
             </a:endParaRPr>
           </a:p>
         </p:txBody>
@@ -16034,7 +15883,7 @@
               </a:solidFill>
               <a:effectLst/>
               <a:uFillTx/>
-              <a:latin typeface="Arial"/>
+              <a:latin typeface="Arial" panose="020B0604020202020204"/>
             </a:endParaRPr>
           </a:p>
         </p:txBody>
@@ -16101,7 +15950,7 @@
               </a:solidFill>
               <a:effectLst/>
               <a:uFillTx/>
-              <a:latin typeface="Arial"/>
+              <a:latin typeface="Arial" panose="020B0604020202020204"/>
             </a:endParaRPr>
           </a:p>
         </p:txBody>
@@ -16143,14 +15992,14 @@
           </a:bodyPr>
           <a:lstStyle/>
           <a:p>
-            <a:pPr marL="177840" indent="-177840" defTabSz="914400">
+            <a:pPr marL="177800" indent="-177800" defTabSz="914400">
               <a:lnSpc>
                 <a:spcPct val="100000"/>
               </a:lnSpc>
               <a:buClr>
                 <a:srgbClr val="23303D"/>
               </a:buClr>
-              <a:buFont typeface="Symbol" charset="2"/>
+              <a:buFont typeface="Symbol" panose="05050102010706020507" charset="2"/>
               <a:buChar char=""/>
             </a:pPr>
             <a:r>
@@ -16170,18 +16019,18 @@
               </a:solidFill>
               <a:effectLst/>
               <a:uFillTx/>
-              <a:latin typeface="Arial"/>
-            </a:endParaRPr>
-          </a:p>
-          <a:p>
-            <a:pPr marL="177840" indent="-177840" defTabSz="914400">
+              <a:latin typeface="Arial" panose="020B0604020202020204"/>
+            </a:endParaRPr>
+          </a:p>
+          <a:p>
+            <a:pPr marL="177800" indent="-177800" defTabSz="914400">
               <a:lnSpc>
                 <a:spcPct val="100000"/>
               </a:lnSpc>
               <a:buClr>
                 <a:srgbClr val="23303D"/>
               </a:buClr>
-              <a:buFont typeface="Symbol" charset="2"/>
+              <a:buFont typeface="Symbol" panose="05050102010706020507" charset="2"/>
               <a:buChar char=""/>
             </a:pPr>
             <a:r>
@@ -16201,18 +16050,18 @@
               </a:solidFill>
               <a:effectLst/>
               <a:uFillTx/>
-              <a:latin typeface="Arial"/>
-            </a:endParaRPr>
-          </a:p>
-          <a:p>
-            <a:pPr marL="177840" indent="-177840" defTabSz="914400">
+              <a:latin typeface="Arial" panose="020B0604020202020204"/>
+            </a:endParaRPr>
+          </a:p>
+          <a:p>
+            <a:pPr marL="177800" indent="-177800" defTabSz="914400">
               <a:lnSpc>
                 <a:spcPct val="100000"/>
               </a:lnSpc>
               <a:buClr>
                 <a:srgbClr val="23303D"/>
               </a:buClr>
-              <a:buFont typeface="Symbol" charset="2"/>
+              <a:buFont typeface="Symbol" panose="05050102010706020507" charset="2"/>
               <a:buChar char=""/>
             </a:pPr>
             <a:r>
@@ -16232,18 +16081,18 @@
               </a:solidFill>
               <a:effectLst/>
               <a:uFillTx/>
-              <a:latin typeface="Arial"/>
-            </a:endParaRPr>
-          </a:p>
-          <a:p>
-            <a:pPr marL="177840" indent="-177840" defTabSz="914400">
+              <a:latin typeface="Arial" panose="020B0604020202020204"/>
+            </a:endParaRPr>
+          </a:p>
+          <a:p>
+            <a:pPr marL="177800" indent="-177800" defTabSz="914400">
               <a:lnSpc>
                 <a:spcPct val="100000"/>
               </a:lnSpc>
               <a:buClr>
                 <a:srgbClr val="23303D"/>
               </a:buClr>
-              <a:buFont typeface="Symbol" charset="2"/>
+              <a:buFont typeface="Symbol" panose="05050102010706020507" charset="2"/>
               <a:buChar char=""/>
             </a:pPr>
             <a:r>
@@ -16263,18 +16112,18 @@
               </a:solidFill>
               <a:effectLst/>
               <a:uFillTx/>
-              <a:latin typeface="Arial"/>
-            </a:endParaRPr>
-          </a:p>
-          <a:p>
-            <a:pPr marL="177840" indent="-177840" defTabSz="914400">
+              <a:latin typeface="Arial" panose="020B0604020202020204"/>
+            </a:endParaRPr>
+          </a:p>
+          <a:p>
+            <a:pPr marL="177800" indent="-177800" defTabSz="914400">
               <a:lnSpc>
                 <a:spcPct val="100000"/>
               </a:lnSpc>
               <a:buClr>
                 <a:srgbClr val="23303D"/>
               </a:buClr>
-              <a:buFont typeface="Symbol" charset="2"/>
+              <a:buFont typeface="Symbol" panose="05050102010706020507" charset="2"/>
               <a:buChar char=""/>
             </a:pPr>
             <a:r>
@@ -16294,18 +16143,18 @@
               </a:solidFill>
               <a:effectLst/>
               <a:uFillTx/>
-              <a:latin typeface="Arial"/>
-            </a:endParaRPr>
-          </a:p>
-          <a:p>
-            <a:pPr marL="177840" indent="-177840" defTabSz="914400">
+              <a:latin typeface="Arial" panose="020B0604020202020204"/>
+            </a:endParaRPr>
+          </a:p>
+          <a:p>
+            <a:pPr marL="177800" indent="-177800" defTabSz="914400">
               <a:lnSpc>
                 <a:spcPct val="100000"/>
               </a:lnSpc>
               <a:buClr>
                 <a:srgbClr val="23303D"/>
               </a:buClr>
-              <a:buFont typeface="Symbol" charset="2"/>
+              <a:buFont typeface="Symbol" panose="05050102010706020507" charset="2"/>
               <a:buChar char=""/>
             </a:pPr>
             <a:r>
@@ -16325,18 +16174,18 @@
               </a:solidFill>
               <a:effectLst/>
               <a:uFillTx/>
-              <a:latin typeface="Arial"/>
-            </a:endParaRPr>
-          </a:p>
-          <a:p>
-            <a:pPr marL="177840" indent="-177840" defTabSz="914400">
+              <a:latin typeface="Arial" panose="020B0604020202020204"/>
+            </a:endParaRPr>
+          </a:p>
+          <a:p>
+            <a:pPr marL="177800" indent="-177800" defTabSz="914400">
               <a:lnSpc>
                 <a:spcPct val="100000"/>
               </a:lnSpc>
               <a:buClr>
                 <a:srgbClr val="23303D"/>
               </a:buClr>
-              <a:buFont typeface="Symbol" charset="2"/>
+              <a:buFont typeface="Symbol" panose="05050102010706020507" charset="2"/>
               <a:buChar char=""/>
             </a:pPr>
             <a:r>
@@ -16356,18 +16205,18 @@
               </a:solidFill>
               <a:effectLst/>
               <a:uFillTx/>
-              <a:latin typeface="Arial"/>
-            </a:endParaRPr>
-          </a:p>
-          <a:p>
-            <a:pPr marL="177840" indent="-177840" defTabSz="914400">
+              <a:latin typeface="Arial" panose="020B0604020202020204"/>
+            </a:endParaRPr>
+          </a:p>
+          <a:p>
+            <a:pPr marL="177800" indent="-177800" defTabSz="914400">
               <a:lnSpc>
                 <a:spcPct val="100000"/>
               </a:lnSpc>
               <a:buClr>
                 <a:srgbClr val="23303D"/>
               </a:buClr>
-              <a:buFont typeface="Symbol" charset="2"/>
+              <a:buFont typeface="Symbol" panose="05050102010706020507" charset="2"/>
               <a:buChar char=""/>
             </a:pPr>
             <a:r>
@@ -16387,7 +16236,7 @@
               </a:solidFill>
               <a:effectLst/>
               <a:uFillTx/>
-              <a:latin typeface="Arial"/>
+              <a:latin typeface="Arial" panose="020B0604020202020204"/>
             </a:endParaRPr>
           </a:p>
         </p:txBody>
@@ -16449,7 +16298,7 @@
               </a:solidFill>
               <a:effectLst/>
               <a:uFillTx/>
-              <a:latin typeface="Arial"/>
+              <a:latin typeface="Arial" panose="020B0604020202020204"/>
             </a:endParaRPr>
           </a:p>
         </p:txBody>
@@ -16504,7 +16353,7 @@
               </a:solidFill>
               <a:effectLst/>
               <a:uFillTx/>
-              <a:latin typeface="Arial"/>
+              <a:latin typeface="Arial" panose="020B0604020202020204"/>
             </a:endParaRPr>
           </a:p>
         </p:txBody>
@@ -16571,7 +16420,7 @@
               </a:solidFill>
               <a:effectLst/>
               <a:uFillTx/>
-              <a:latin typeface="Arial"/>
+              <a:latin typeface="Arial" panose="020B0604020202020204"/>
             </a:endParaRPr>
           </a:p>
         </p:txBody>
@@ -16624,7 +16473,7 @@
               </a:solidFill>
               <a:effectLst/>
               <a:uFillTx/>
-              <a:latin typeface="Arial"/>
+              <a:latin typeface="Arial" panose="020B0604020202020204"/>
             </a:endParaRPr>
           </a:p>
         </p:txBody>
@@ -16691,7 +16540,7 @@
               </a:solidFill>
               <a:effectLst/>
               <a:uFillTx/>
-              <a:latin typeface="Arial"/>
+              <a:latin typeface="Arial" panose="020B0604020202020204"/>
             </a:endParaRPr>
           </a:p>
         </p:txBody>
@@ -16758,7 +16607,7 @@
               </a:solidFill>
               <a:effectLst/>
               <a:uFillTx/>
-              <a:latin typeface="Arial"/>
+              <a:latin typeface="Arial" panose="020B0604020202020204"/>
             </a:endParaRPr>
           </a:p>
         </p:txBody>
@@ -16811,7 +16660,7 @@
               </a:solidFill>
               <a:effectLst/>
               <a:uFillTx/>
-              <a:latin typeface="Arial"/>
+              <a:latin typeface="Arial" panose="020B0604020202020204"/>
             </a:endParaRPr>
           </a:p>
         </p:txBody>
@@ -16878,7 +16727,7 @@
               </a:solidFill>
               <a:effectLst/>
               <a:uFillTx/>
-              <a:latin typeface="Arial"/>
+              <a:latin typeface="Arial" panose="020B0604020202020204"/>
             </a:endParaRPr>
           </a:p>
         </p:txBody>
@@ -16945,7 +16794,7 @@
               </a:solidFill>
               <a:effectLst/>
               <a:uFillTx/>
-              <a:latin typeface="Arial"/>
+              <a:latin typeface="Arial" panose="020B0604020202020204"/>
             </a:endParaRPr>
           </a:p>
         </p:txBody>
@@ -16998,7 +16847,7 @@
               </a:solidFill>
               <a:effectLst/>
               <a:uFillTx/>
-              <a:latin typeface="Arial"/>
+              <a:latin typeface="Arial" panose="020B0604020202020204"/>
             </a:endParaRPr>
           </a:p>
         </p:txBody>
@@ -17065,7 +16914,7 @@
               </a:solidFill>
               <a:effectLst/>
               <a:uFillTx/>
-              <a:latin typeface="Arial"/>
+              <a:latin typeface="Arial" panose="020B0604020202020204"/>
             </a:endParaRPr>
           </a:p>
         </p:txBody>
@@ -17132,7 +16981,7 @@
               </a:solidFill>
               <a:effectLst/>
               <a:uFillTx/>
-              <a:latin typeface="Arial"/>
+              <a:latin typeface="Arial" panose="020B0604020202020204"/>
             </a:endParaRPr>
           </a:p>
         </p:txBody>
@@ -17185,7 +17034,7 @@
               </a:solidFill>
               <a:effectLst/>
               <a:uFillTx/>
-              <a:latin typeface="Arial"/>
+              <a:latin typeface="Arial" panose="020B0604020202020204"/>
             </a:endParaRPr>
           </a:p>
         </p:txBody>
@@ -17252,7 +17101,7 @@
               </a:solidFill>
               <a:effectLst/>
               <a:uFillTx/>
-              <a:latin typeface="Arial"/>
+              <a:latin typeface="Arial" panose="020B0604020202020204"/>
             </a:endParaRPr>
           </a:p>
         </p:txBody>
@@ -17319,7 +17168,7 @@
               </a:solidFill>
               <a:effectLst/>
               <a:uFillTx/>
-              <a:latin typeface="Arial"/>
+              <a:latin typeface="Arial" panose="020B0604020202020204"/>
             </a:endParaRPr>
           </a:p>
         </p:txBody>
@@ -17372,7 +17221,7 @@
               </a:solidFill>
               <a:effectLst/>
               <a:uFillTx/>
-              <a:latin typeface="Arial"/>
+              <a:latin typeface="Arial" panose="020B0604020202020204"/>
             </a:endParaRPr>
           </a:p>
         </p:txBody>
@@ -17439,7 +17288,7 @@
               </a:solidFill>
               <a:effectLst/>
               <a:uFillTx/>
-              <a:latin typeface="Arial"/>
+              <a:latin typeface="Arial" panose="020B0604020202020204"/>
             </a:endParaRPr>
           </a:p>
         </p:txBody>
@@ -17506,7 +17355,7 @@
               </a:solidFill>
               <a:effectLst/>
               <a:uFillTx/>
-              <a:latin typeface="Arial"/>
+              <a:latin typeface="Arial" panose="020B0604020202020204"/>
             </a:endParaRPr>
           </a:p>
         </p:txBody>
@@ -17559,7 +17408,7 @@
               </a:solidFill>
               <a:effectLst/>
               <a:uFillTx/>
-              <a:latin typeface="Arial"/>
+              <a:latin typeface="Arial" panose="020B0604020202020204"/>
             </a:endParaRPr>
           </a:p>
         </p:txBody>
@@ -17626,7 +17475,7 @@
               </a:solidFill>
               <a:effectLst/>
               <a:uFillTx/>
-              <a:latin typeface="Arial"/>
+              <a:latin typeface="Arial" panose="020B0604020202020204"/>
             </a:endParaRPr>
           </a:p>
         </p:txBody>
@@ -17693,7 +17542,7 @@
               </a:solidFill>
               <a:effectLst/>
               <a:uFillTx/>
-              <a:latin typeface="Arial"/>
+              <a:latin typeface="Arial" panose="020B0604020202020204"/>
             </a:endParaRPr>
           </a:p>
         </p:txBody>
@@ -17746,7 +17595,7 @@
               </a:solidFill>
               <a:effectLst/>
               <a:uFillTx/>
-              <a:latin typeface="Arial"/>
+              <a:latin typeface="Arial" panose="020B0604020202020204"/>
             </a:endParaRPr>
           </a:p>
         </p:txBody>
@@ -17813,7 +17662,7 @@
               </a:solidFill>
               <a:effectLst/>
               <a:uFillTx/>
-              <a:latin typeface="Arial"/>
+              <a:latin typeface="Arial" panose="020B0604020202020204"/>
             </a:endParaRPr>
           </a:p>
         </p:txBody>
@@ -17880,7 +17729,7 @@
               </a:solidFill>
               <a:effectLst/>
               <a:uFillTx/>
-              <a:latin typeface="Arial"/>
+              <a:latin typeface="Arial" panose="020B0604020202020204"/>
             </a:endParaRPr>
           </a:p>
         </p:txBody>
@@ -17935,7 +17784,7 @@
               </a:solidFill>
               <a:effectLst/>
               <a:uFillTx/>
-              <a:latin typeface="Arial"/>
+              <a:latin typeface="Arial" panose="020B0604020202020204"/>
             </a:endParaRPr>
           </a:p>
         </p:txBody>
@@ -18002,7 +17851,7 @@
               </a:solidFill>
               <a:effectLst/>
               <a:uFillTx/>
-              <a:latin typeface="Arial"/>
+              <a:latin typeface="Arial" panose="020B0604020202020204"/>
             </a:endParaRPr>
           </a:p>
         </p:txBody>
@@ -18068,7 +17917,6 @@
                 <a:latin typeface="Aptos"/>
                 <a:ea typeface="Aptos"/>
               </a:rPr>
-              <a:t>5</a:t>
             </a:fld>
             <a:endParaRPr lang="en-US" sz="900" b="0" u="none" strike="noStrike">
               <a:solidFill>
@@ -18076,7 +17924,7 @@
               </a:solidFill>
               <a:effectLst/>
               <a:uFillTx/>
-              <a:latin typeface="Times New Roman"/>
+              <a:latin typeface="Times New Roman" panose="02020603050405020304"/>
             </a:endParaRPr>
           </a:p>
         </p:txBody>
@@ -18169,7 +18017,7 @@
               </a:solidFill>
               <a:effectLst/>
               <a:uFillTx/>
-              <a:latin typeface="Arial"/>
+              <a:latin typeface="Arial" panose="020B0604020202020204"/>
             </a:endParaRPr>
           </a:p>
         </p:txBody>
@@ -18236,7 +18084,7 @@
               </a:solidFill>
               <a:effectLst/>
               <a:uFillTx/>
-              <a:latin typeface="Arial"/>
+              <a:latin typeface="Arial" panose="020B0604020202020204"/>
             </a:endParaRPr>
           </a:p>
         </p:txBody>
@@ -18298,7 +18146,7 @@
               </a:solidFill>
               <a:effectLst/>
               <a:uFillTx/>
-              <a:latin typeface="Arial"/>
+              <a:latin typeface="Arial" panose="020B0604020202020204"/>
             </a:endParaRPr>
           </a:p>
         </p:txBody>
@@ -18310,8 +18158,10 @@
           <p:nvPr/>
         </p:nvPicPr>
         <p:blipFill>
-          <a:blip r:embed="rId3"/>
-          <a:stretch/>
+          <a:blip r:embed="rId1"/>
+          <a:stretch>
+            <a:fillRect/>
+          </a:stretch>
         </p:blipFill>
         <p:spPr>
           <a:xfrm>
@@ -18384,7 +18234,7 @@
               </a:solidFill>
               <a:effectLst/>
               <a:uFillTx/>
-              <a:latin typeface="Arial"/>
+              <a:latin typeface="Arial" panose="020B0604020202020204"/>
             </a:endParaRPr>
           </a:p>
         </p:txBody>
@@ -18451,7 +18301,7 @@
               </a:solidFill>
               <a:effectLst/>
               <a:uFillTx/>
-              <a:latin typeface="Arial"/>
+              <a:latin typeface="Arial" panose="020B0604020202020204"/>
             </a:endParaRPr>
           </a:p>
         </p:txBody>
@@ -18504,7 +18354,7 @@
               </a:solidFill>
               <a:effectLst/>
               <a:uFillTx/>
-              <a:latin typeface="Arial"/>
+              <a:latin typeface="Arial" panose="020B0604020202020204"/>
             </a:endParaRPr>
           </a:p>
         </p:txBody>
@@ -18571,7 +18421,7 @@
               </a:solidFill>
               <a:effectLst/>
               <a:uFillTx/>
-              <a:latin typeface="Arial"/>
+              <a:latin typeface="Arial" panose="020B0604020202020204"/>
             </a:endParaRPr>
           </a:p>
         </p:txBody>
@@ -18638,7 +18488,7 @@
               </a:solidFill>
               <a:effectLst/>
               <a:uFillTx/>
-              <a:latin typeface="Arial"/>
+              <a:latin typeface="Arial" panose="020B0604020202020204"/>
             </a:endParaRPr>
           </a:p>
         </p:txBody>
@@ -18705,7 +18555,7 @@
               </a:solidFill>
               <a:effectLst/>
               <a:uFillTx/>
-              <a:latin typeface="Arial"/>
+              <a:latin typeface="Arial" panose="020B0604020202020204"/>
             </a:endParaRPr>
           </a:p>
         </p:txBody>
@@ -18758,7 +18608,7 @@
               </a:solidFill>
               <a:effectLst/>
               <a:uFillTx/>
-              <a:latin typeface="Arial"/>
+              <a:latin typeface="Arial" panose="020B0604020202020204"/>
             </a:endParaRPr>
           </a:p>
         </p:txBody>
@@ -18825,7 +18675,7 @@
               </a:solidFill>
               <a:effectLst/>
               <a:uFillTx/>
-              <a:latin typeface="Arial"/>
+              <a:latin typeface="Arial" panose="020B0604020202020204"/>
             </a:endParaRPr>
           </a:p>
         </p:txBody>
@@ -18892,7 +18742,7 @@
               </a:solidFill>
               <a:effectLst/>
               <a:uFillTx/>
-              <a:latin typeface="Arial"/>
+              <a:latin typeface="Arial" panose="020B0604020202020204"/>
             </a:endParaRPr>
           </a:p>
         </p:txBody>
@@ -18959,7 +18809,7 @@
               </a:solidFill>
               <a:effectLst/>
               <a:uFillTx/>
-              <a:latin typeface="Arial"/>
+              <a:latin typeface="Arial" panose="020B0604020202020204"/>
             </a:endParaRPr>
           </a:p>
         </p:txBody>
@@ -19012,7 +18862,7 @@
               </a:solidFill>
               <a:effectLst/>
               <a:uFillTx/>
-              <a:latin typeface="Arial"/>
+              <a:latin typeface="Arial" panose="020B0604020202020204"/>
             </a:endParaRPr>
           </a:p>
         </p:txBody>
@@ -19079,7 +18929,7 @@
               </a:solidFill>
               <a:effectLst/>
               <a:uFillTx/>
-              <a:latin typeface="Arial"/>
+              <a:latin typeface="Arial" panose="020B0604020202020204"/>
             </a:endParaRPr>
           </a:p>
         </p:txBody>
@@ -19146,7 +18996,7 @@
               </a:solidFill>
               <a:effectLst/>
               <a:uFillTx/>
-              <a:latin typeface="Arial"/>
+              <a:latin typeface="Arial" panose="020B0604020202020204"/>
             </a:endParaRPr>
           </a:p>
         </p:txBody>
@@ -19213,7 +19063,7 @@
               </a:solidFill>
               <a:effectLst/>
               <a:uFillTx/>
-              <a:latin typeface="Arial"/>
+              <a:latin typeface="Arial" panose="020B0604020202020204"/>
             </a:endParaRPr>
           </a:p>
         </p:txBody>
@@ -19266,7 +19116,7 @@
               </a:solidFill>
               <a:effectLst/>
               <a:uFillTx/>
-              <a:latin typeface="Arial"/>
+              <a:latin typeface="Arial" panose="020B0604020202020204"/>
             </a:endParaRPr>
           </a:p>
         </p:txBody>
@@ -19333,7 +19183,7 @@
               </a:solidFill>
               <a:effectLst/>
               <a:uFillTx/>
-              <a:latin typeface="Arial"/>
+              <a:latin typeface="Arial" panose="020B0604020202020204"/>
             </a:endParaRPr>
           </a:p>
         </p:txBody>
@@ -19400,7 +19250,7 @@
               </a:solidFill>
               <a:effectLst/>
               <a:uFillTx/>
-              <a:latin typeface="Arial"/>
+              <a:latin typeface="Arial" panose="020B0604020202020204"/>
             </a:endParaRPr>
           </a:p>
         </p:txBody>
@@ -19467,7 +19317,7 @@
               </a:solidFill>
               <a:effectLst/>
               <a:uFillTx/>
-              <a:latin typeface="Arial"/>
+              <a:latin typeface="Arial" panose="020B0604020202020204"/>
             </a:endParaRPr>
           </a:p>
         </p:txBody>
@@ -19520,7 +19370,7 @@
               </a:solidFill>
               <a:effectLst/>
               <a:uFillTx/>
-              <a:latin typeface="Arial"/>
+              <a:latin typeface="Arial" panose="020B0604020202020204"/>
             </a:endParaRPr>
           </a:p>
         </p:txBody>
@@ -19587,7 +19437,7 @@
               </a:solidFill>
               <a:effectLst/>
               <a:uFillTx/>
-              <a:latin typeface="Arial"/>
+              <a:latin typeface="Arial" panose="020B0604020202020204"/>
             </a:endParaRPr>
           </a:p>
         </p:txBody>
@@ -19654,7 +19504,7 @@
               </a:solidFill>
               <a:effectLst/>
               <a:uFillTx/>
-              <a:latin typeface="Arial"/>
+              <a:latin typeface="Arial" panose="020B0604020202020204"/>
             </a:endParaRPr>
           </a:p>
         </p:txBody>
@@ -19721,7 +19571,7 @@
               </a:solidFill>
               <a:effectLst/>
               <a:uFillTx/>
-              <a:latin typeface="Arial"/>
+              <a:latin typeface="Arial" panose="020B0604020202020204"/>
             </a:endParaRPr>
           </a:p>
         </p:txBody>
@@ -19776,7 +19626,7 @@
               </a:solidFill>
               <a:effectLst/>
               <a:uFillTx/>
-              <a:latin typeface="Arial"/>
+              <a:latin typeface="Arial" panose="020B0604020202020204"/>
             </a:endParaRPr>
           </a:p>
         </p:txBody>
@@ -19843,7 +19693,7 @@
               </a:solidFill>
               <a:effectLst/>
               <a:uFillTx/>
-              <a:latin typeface="Arial"/>
+              <a:latin typeface="Arial" panose="020B0604020202020204"/>
             </a:endParaRPr>
           </a:p>
         </p:txBody>
@@ -19909,7 +19759,6 @@
                 <a:latin typeface="Aptos"/>
                 <a:ea typeface="Aptos"/>
               </a:rPr>
-              <a:t>6</a:t>
             </a:fld>
             <a:endParaRPr lang="en-US" sz="900" b="0" u="none" strike="noStrike">
               <a:solidFill>
@@ -19917,7 +19766,7 @@
               </a:solidFill>
               <a:effectLst/>
               <a:uFillTx/>
-              <a:latin typeface="Times New Roman"/>
+              <a:latin typeface="Times New Roman" panose="02020603050405020304"/>
             </a:endParaRPr>
           </a:p>
         </p:txBody>
@@ -20010,7 +19859,7 @@
               </a:solidFill>
               <a:effectLst/>
               <a:uFillTx/>
-              <a:latin typeface="Arial"/>
+              <a:latin typeface="Arial" panose="020B0604020202020204"/>
             </a:endParaRPr>
           </a:p>
         </p:txBody>
@@ -20077,7 +19926,7 @@
               </a:solidFill>
               <a:effectLst/>
               <a:uFillTx/>
-              <a:latin typeface="Arial"/>
+              <a:latin typeface="Arial" panose="020B0604020202020204"/>
             </a:endParaRPr>
           </a:p>
         </p:txBody>
@@ -20139,7 +19988,7 @@
               </a:solidFill>
               <a:effectLst/>
               <a:uFillTx/>
-              <a:latin typeface="Arial"/>
+              <a:latin typeface="Arial" panose="020B0604020202020204"/>
             </a:endParaRPr>
           </a:p>
         </p:txBody>
@@ -20151,7 +20000,7 @@
           <p:nvPr/>
         </p:nvPicPr>
         <p:blipFill>
-          <a:blip r:embed="rId3"/>
+          <a:blip r:embed="rId1"/>
           <a:srcRect b="95667"/>
           <a:stretch>
             <a:fillRect/>
@@ -20221,7 +20070,7 @@
               </a:solidFill>
               <a:effectLst/>
               <a:uFillTx/>
-              <a:latin typeface="Arial"/>
+              <a:latin typeface="Arial" panose="020B0604020202020204"/>
             </a:endParaRPr>
           </a:p>
         </p:txBody>
@@ -20288,7 +20137,7 @@
               </a:solidFill>
               <a:effectLst/>
               <a:uFillTx/>
-              <a:latin typeface="Arial"/>
+              <a:latin typeface="Arial" panose="020B0604020202020204"/>
             </a:endParaRPr>
           </a:p>
         </p:txBody>
@@ -20355,7 +20204,7 @@
               </a:solidFill>
               <a:effectLst/>
               <a:uFillTx/>
-              <a:latin typeface="Arial"/>
+              <a:latin typeface="Arial" panose="020B0604020202020204"/>
             </a:endParaRPr>
           </a:p>
         </p:txBody>
@@ -20410,7 +20259,7 @@
               </a:solidFill>
               <a:effectLst/>
               <a:uFillTx/>
-              <a:latin typeface="Arial"/>
+              <a:latin typeface="Arial" panose="020B0604020202020204"/>
             </a:endParaRPr>
           </a:p>
         </p:txBody>
@@ -20477,7 +20326,7 @@
               </a:solidFill>
               <a:effectLst/>
               <a:uFillTx/>
-              <a:latin typeface="Arial"/>
+              <a:latin typeface="Arial" panose="020B0604020202020204"/>
             </a:endParaRPr>
           </a:p>
         </p:txBody>
@@ -20544,7 +20393,7 @@
               </a:solidFill>
               <a:effectLst/>
               <a:uFillTx/>
-              <a:latin typeface="Arial"/>
+              <a:latin typeface="Arial" panose="020B0604020202020204"/>
             </a:endParaRPr>
           </a:p>
         </p:txBody>
@@ -20599,7 +20448,7 @@
               </a:solidFill>
               <a:effectLst/>
               <a:uFillTx/>
-              <a:latin typeface="Arial"/>
+              <a:latin typeface="Arial" panose="020B0604020202020204"/>
             </a:endParaRPr>
           </a:p>
         </p:txBody>
@@ -20666,7 +20515,7 @@
               </a:solidFill>
               <a:effectLst/>
               <a:uFillTx/>
-              <a:latin typeface="Arial"/>
+              <a:latin typeface="Arial" panose="020B0604020202020204"/>
             </a:endParaRPr>
           </a:p>
         </p:txBody>
@@ -20733,7 +20582,7 @@
               </a:solidFill>
               <a:effectLst/>
               <a:uFillTx/>
-              <a:latin typeface="Arial"/>
+              <a:latin typeface="Arial" panose="020B0604020202020204"/>
             </a:endParaRPr>
           </a:p>
         </p:txBody>
@@ -20799,7 +20648,6 @@
                 <a:latin typeface="Aptos"/>
                 <a:ea typeface="Aptos"/>
               </a:rPr>
-              <a:t>7</a:t>
             </a:fld>
             <a:endParaRPr lang="en-US" sz="900" b="0" u="none" strike="noStrike">
               <a:solidFill>
@@ -20807,27 +20655,21 @@
               </a:solidFill>
               <a:effectLst/>
               <a:uFillTx/>
-              <a:latin typeface="Times New Roman"/>
+              <a:latin typeface="Times New Roman" panose="02020603050405020304"/>
             </a:endParaRPr>
           </a:p>
         </p:txBody>
       </p:sp>
       <p:pic>
         <p:nvPicPr>
-          <p:cNvPr id="3" name="图片 2">
-            <a:extLst>
-              <a:ext uri="{FF2B5EF4-FFF2-40B4-BE49-F238E27FC236}">
-                <a16:creationId xmlns:a16="http://schemas.microsoft.com/office/drawing/2014/main" id="{8F5A4259-6A7A-697D-B329-09D67169626F}"/>
-              </a:ext>
-            </a:extLst>
-          </p:cNvPr>
+          <p:cNvPr id="3" name="图片 2"/>
           <p:cNvPicPr>
             <a:picLocks noChangeAspect="1"/>
           </p:cNvPicPr>
           <p:nvPr/>
         </p:nvPicPr>
         <p:blipFill>
-          <a:blip r:embed="rId4" cstate="print">
+          <a:blip r:embed="rId2" cstate="print">
             <a:extLst>
               <a:ext uri="{28A0092B-C50C-407E-A947-70E740481C1C}">
                 <a14:useLocalDpi xmlns:a14="http://schemas.microsoft.com/office/drawing/2010/main" val="0"/>
@@ -20937,7 +20779,7 @@
               </a:solidFill>
               <a:effectLst/>
               <a:uFillTx/>
-              <a:latin typeface="Arial"/>
+              <a:latin typeface="Arial" panose="020B0604020202020204"/>
             </a:endParaRPr>
           </a:p>
         </p:txBody>
@@ -21004,7 +20846,7 @@
               </a:solidFill>
               <a:effectLst/>
               <a:uFillTx/>
-              <a:latin typeface="Arial"/>
+              <a:latin typeface="Arial" panose="020B0604020202020204"/>
             </a:endParaRPr>
           </a:p>
         </p:txBody>
@@ -21066,7 +20908,7 @@
               </a:solidFill>
               <a:effectLst/>
               <a:uFillTx/>
-              <a:latin typeface="Arial"/>
+              <a:latin typeface="Arial" panose="020B0604020202020204"/>
             </a:endParaRPr>
           </a:p>
         </p:txBody>
@@ -21133,7 +20975,7 @@
               </a:solidFill>
               <a:effectLst/>
               <a:uFillTx/>
-              <a:latin typeface="Arial"/>
+              <a:latin typeface="Arial" panose="020B0604020202020204"/>
             </a:endParaRPr>
           </a:p>
         </p:txBody>
@@ -21175,14 +21017,14 @@
           </a:bodyPr>
           <a:lstStyle/>
           <a:p>
-            <a:pPr marL="177840" indent="-177840" defTabSz="914400">
+            <a:pPr marL="177800" indent="-177800" defTabSz="914400">
               <a:lnSpc>
                 <a:spcPct val="100000"/>
               </a:lnSpc>
               <a:buClr>
                 <a:srgbClr val="23303D"/>
               </a:buClr>
-              <a:buFont typeface="Symbol" charset="2"/>
+              <a:buFont typeface="Symbol" panose="05050102010706020507" charset="2"/>
               <a:buChar char=""/>
             </a:pPr>
             <a:r>
@@ -21202,18 +21044,18 @@
               </a:solidFill>
               <a:effectLst/>
               <a:uFillTx/>
-              <a:latin typeface="Arial"/>
-            </a:endParaRPr>
-          </a:p>
-          <a:p>
-            <a:pPr marL="177840" indent="-177840" defTabSz="914400">
+              <a:latin typeface="Arial" panose="020B0604020202020204"/>
+            </a:endParaRPr>
+          </a:p>
+          <a:p>
+            <a:pPr marL="177800" indent="-177800" defTabSz="914400">
               <a:lnSpc>
                 <a:spcPct val="100000"/>
               </a:lnSpc>
               <a:buClr>
                 <a:srgbClr val="23303D"/>
               </a:buClr>
-              <a:buFont typeface="Symbol" charset="2"/>
+              <a:buFont typeface="Symbol" panose="05050102010706020507" charset="2"/>
               <a:buChar char=""/>
             </a:pPr>
             <a:r>
@@ -21233,18 +21075,18 @@
               </a:solidFill>
               <a:effectLst/>
               <a:uFillTx/>
-              <a:latin typeface="Arial"/>
-            </a:endParaRPr>
-          </a:p>
-          <a:p>
-            <a:pPr marL="177840" indent="-177840" defTabSz="914400">
+              <a:latin typeface="Arial" panose="020B0604020202020204"/>
+            </a:endParaRPr>
+          </a:p>
+          <a:p>
+            <a:pPr marL="177800" indent="-177800" defTabSz="914400">
               <a:lnSpc>
                 <a:spcPct val="100000"/>
               </a:lnSpc>
               <a:buClr>
                 <a:srgbClr val="23303D"/>
               </a:buClr>
-              <a:buFont typeface="Symbol" charset="2"/>
+              <a:buFont typeface="Symbol" panose="05050102010706020507" charset="2"/>
               <a:buChar char=""/>
             </a:pPr>
             <a:r>
@@ -21264,18 +21106,18 @@
               </a:solidFill>
               <a:effectLst/>
               <a:uFillTx/>
-              <a:latin typeface="Arial"/>
-            </a:endParaRPr>
-          </a:p>
-          <a:p>
-            <a:pPr marL="177840" indent="-177840" defTabSz="914400">
+              <a:latin typeface="Arial" panose="020B0604020202020204"/>
+            </a:endParaRPr>
+          </a:p>
+          <a:p>
+            <a:pPr marL="177800" indent="-177800" defTabSz="914400">
               <a:lnSpc>
                 <a:spcPct val="100000"/>
               </a:lnSpc>
               <a:buClr>
                 <a:srgbClr val="23303D"/>
               </a:buClr>
-              <a:buFont typeface="Symbol" charset="2"/>
+              <a:buFont typeface="Symbol" panose="05050102010706020507" charset="2"/>
               <a:buChar char=""/>
             </a:pPr>
             <a:r>
@@ -21295,18 +21137,18 @@
               </a:solidFill>
               <a:effectLst/>
               <a:uFillTx/>
-              <a:latin typeface="Arial"/>
-            </a:endParaRPr>
-          </a:p>
-          <a:p>
-            <a:pPr marL="177840" indent="-177840" defTabSz="914400">
+              <a:latin typeface="Arial" panose="020B0604020202020204"/>
+            </a:endParaRPr>
+          </a:p>
+          <a:p>
+            <a:pPr marL="177800" indent="-177800" defTabSz="914400">
               <a:lnSpc>
                 <a:spcPct val="100000"/>
               </a:lnSpc>
               <a:buClr>
                 <a:srgbClr val="23303D"/>
               </a:buClr>
-              <a:buFont typeface="Symbol" charset="2"/>
+              <a:buFont typeface="Symbol" panose="05050102010706020507" charset="2"/>
               <a:buChar char=""/>
             </a:pPr>
             <a:r>
@@ -21326,18 +21168,18 @@
               </a:solidFill>
               <a:effectLst/>
               <a:uFillTx/>
-              <a:latin typeface="Arial"/>
-            </a:endParaRPr>
-          </a:p>
-          <a:p>
-            <a:pPr marL="177840" indent="-177840" defTabSz="914400">
+              <a:latin typeface="Arial" panose="020B0604020202020204"/>
+            </a:endParaRPr>
+          </a:p>
+          <a:p>
+            <a:pPr marL="177800" indent="-177800" defTabSz="914400">
               <a:lnSpc>
                 <a:spcPct val="100000"/>
               </a:lnSpc>
               <a:buClr>
                 <a:srgbClr val="23303D"/>
               </a:buClr>
-              <a:buFont typeface="Symbol" charset="2"/>
+              <a:buFont typeface="Symbol" panose="05050102010706020507" charset="2"/>
               <a:buChar char=""/>
             </a:pPr>
             <a:r>
@@ -21357,18 +21199,18 @@
               </a:solidFill>
               <a:effectLst/>
               <a:uFillTx/>
-              <a:latin typeface="Arial"/>
-            </a:endParaRPr>
-          </a:p>
-          <a:p>
-            <a:pPr marL="177840" indent="-177840" defTabSz="914400">
+              <a:latin typeface="Arial" panose="020B0604020202020204"/>
+            </a:endParaRPr>
+          </a:p>
+          <a:p>
+            <a:pPr marL="177800" indent="-177800" defTabSz="914400">
               <a:lnSpc>
                 <a:spcPct val="100000"/>
               </a:lnSpc>
               <a:buClr>
                 <a:srgbClr val="23303D"/>
               </a:buClr>
-              <a:buFont typeface="Symbol" charset="2"/>
+              <a:buFont typeface="Symbol" panose="05050102010706020507" charset="2"/>
               <a:buChar char=""/>
             </a:pPr>
             <a:r>
@@ -21388,7 +21230,7 @@
               </a:solidFill>
               <a:effectLst/>
               <a:uFillTx/>
-              <a:latin typeface="Arial"/>
+              <a:latin typeface="Arial" panose="020B0604020202020204"/>
             </a:endParaRPr>
           </a:p>
         </p:txBody>
@@ -21450,7 +21292,7 @@
               </a:solidFill>
               <a:effectLst/>
               <a:uFillTx/>
-              <a:latin typeface="Arial"/>
+              <a:latin typeface="Arial" panose="020B0604020202020204"/>
             </a:endParaRPr>
           </a:p>
         </p:txBody>
@@ -21517,7 +21359,7 @@
               </a:solidFill>
               <a:effectLst/>
               <a:uFillTx/>
-              <a:latin typeface="Arial"/>
+              <a:latin typeface="Arial" panose="020B0604020202020204"/>
             </a:endParaRPr>
           </a:p>
         </p:txBody>
@@ -21559,14 +21401,14 @@
           </a:bodyPr>
           <a:lstStyle/>
           <a:p>
-            <a:pPr marL="177840" indent="-177840" defTabSz="914400">
+            <a:pPr marL="177800" indent="-177800" defTabSz="914400">
               <a:lnSpc>
                 <a:spcPct val="100000"/>
               </a:lnSpc>
               <a:buClr>
                 <a:srgbClr val="23303D"/>
               </a:buClr>
-              <a:buFont typeface="Symbol" charset="2"/>
+              <a:buFont typeface="Symbol" panose="05050102010706020507" charset="2"/>
               <a:buChar char=""/>
             </a:pPr>
             <a:r>
@@ -21586,18 +21428,18 @@
               </a:solidFill>
               <a:effectLst/>
               <a:uFillTx/>
-              <a:latin typeface="Arial"/>
-            </a:endParaRPr>
-          </a:p>
-          <a:p>
-            <a:pPr marL="177840" indent="-177840" defTabSz="914400">
+              <a:latin typeface="Arial" panose="020B0604020202020204"/>
+            </a:endParaRPr>
+          </a:p>
+          <a:p>
+            <a:pPr marL="177800" indent="-177800" defTabSz="914400">
               <a:lnSpc>
                 <a:spcPct val="100000"/>
               </a:lnSpc>
               <a:buClr>
                 <a:srgbClr val="23303D"/>
               </a:buClr>
-              <a:buFont typeface="Symbol" charset="2"/>
+              <a:buFont typeface="Symbol" panose="05050102010706020507" charset="2"/>
               <a:buChar char=""/>
             </a:pPr>
             <a:r>
@@ -21617,7 +21459,7 @@
               </a:solidFill>
               <a:effectLst/>
               <a:uFillTx/>
-              <a:latin typeface="Arial"/>
+              <a:latin typeface="Arial" panose="020B0604020202020204"/>
             </a:endParaRPr>
           </a:p>
         </p:txBody>
@@ -21679,7 +21521,7 @@
               </a:solidFill>
               <a:effectLst/>
               <a:uFillTx/>
-              <a:latin typeface="Arial"/>
+              <a:latin typeface="Arial" panose="020B0604020202020204"/>
             </a:endParaRPr>
           </a:p>
         </p:txBody>
@@ -21746,7 +21588,7 @@
               </a:solidFill>
               <a:effectLst/>
               <a:uFillTx/>
-              <a:latin typeface="Arial"/>
+              <a:latin typeface="Arial" panose="020B0604020202020204"/>
             </a:endParaRPr>
           </a:p>
         </p:txBody>
@@ -21813,7 +21655,7 @@
               </a:solidFill>
               <a:effectLst/>
               <a:uFillTx/>
-              <a:latin typeface="Arial"/>
+              <a:latin typeface="Arial" panose="020B0604020202020204"/>
             </a:endParaRPr>
           </a:p>
         </p:txBody>
@@ -21868,7 +21710,7 @@
               </a:solidFill>
               <a:effectLst/>
               <a:uFillTx/>
-              <a:latin typeface="Arial"/>
+              <a:latin typeface="Arial" panose="020B0604020202020204"/>
             </a:endParaRPr>
           </a:p>
         </p:txBody>
@@ -21935,7 +21777,7 @@
               </a:solidFill>
               <a:effectLst/>
               <a:uFillTx/>
-              <a:latin typeface="Arial"/>
+              <a:latin typeface="Arial" panose="020B0604020202020204"/>
             </a:endParaRPr>
           </a:p>
         </p:txBody>
@@ -22002,7 +21844,7 @@
               </a:solidFill>
               <a:effectLst/>
               <a:uFillTx/>
-              <a:latin typeface="Arial"/>
+              <a:latin typeface="Arial" panose="020B0604020202020204"/>
             </a:endParaRPr>
           </a:p>
         </p:txBody>
@@ -22064,7 +21906,7 @@
               </a:solidFill>
               <a:effectLst/>
               <a:uFillTx/>
-              <a:latin typeface="Arial"/>
+              <a:latin typeface="Arial" panose="020B0604020202020204"/>
             </a:endParaRPr>
           </a:p>
         </p:txBody>
@@ -22131,7 +21973,7 @@
               </a:solidFill>
               <a:effectLst/>
               <a:uFillTx/>
-              <a:latin typeface="Arial"/>
+              <a:latin typeface="Arial" panose="020B0604020202020204"/>
             </a:endParaRPr>
           </a:p>
         </p:txBody>
@@ -22184,7 +22026,7 @@
               </a:solidFill>
               <a:effectLst/>
               <a:uFillTx/>
-              <a:latin typeface="Arial"/>
+              <a:latin typeface="Arial" panose="020B0604020202020204"/>
             </a:endParaRPr>
           </a:p>
         </p:txBody>
@@ -22251,7 +22093,7 @@
               </a:solidFill>
               <a:effectLst/>
               <a:uFillTx/>
-              <a:latin typeface="Arial"/>
+              <a:latin typeface="Arial" panose="020B0604020202020204"/>
             </a:endParaRPr>
           </a:p>
         </p:txBody>
@@ -22301,7 +22143,7 @@
               </a:solidFill>
               <a:effectLst/>
               <a:uFillTx/>
-              <a:latin typeface="Arial"/>
+              <a:latin typeface="Arial" panose="020B0604020202020204"/>
             </a:endParaRPr>
           </a:p>
         </p:txBody>
@@ -22368,7 +22210,7 @@
               </a:solidFill>
               <a:effectLst/>
               <a:uFillTx/>
-              <a:latin typeface="Arial"/>
+              <a:latin typeface="Arial" panose="020B0604020202020204"/>
             </a:endParaRPr>
           </a:p>
         </p:txBody>
@@ -22421,7 +22263,7 @@
               </a:solidFill>
               <a:effectLst/>
               <a:uFillTx/>
-              <a:latin typeface="Arial"/>
+              <a:latin typeface="Arial" panose="020B0604020202020204"/>
             </a:endParaRPr>
           </a:p>
         </p:txBody>
@@ -22488,7 +22330,7 @@
               </a:solidFill>
               <a:effectLst/>
               <a:uFillTx/>
-              <a:latin typeface="Arial"/>
+              <a:latin typeface="Arial" panose="020B0604020202020204"/>
             </a:endParaRPr>
           </a:p>
         </p:txBody>
@@ -22538,7 +22380,7 @@
               </a:solidFill>
               <a:effectLst/>
               <a:uFillTx/>
-              <a:latin typeface="Arial"/>
+              <a:latin typeface="Arial" panose="020B0604020202020204"/>
             </a:endParaRPr>
           </a:p>
         </p:txBody>
@@ -22605,7 +22447,7 @@
               </a:solidFill>
               <a:effectLst/>
               <a:uFillTx/>
-              <a:latin typeface="Arial"/>
+              <a:latin typeface="Arial" panose="020B0604020202020204"/>
             </a:endParaRPr>
           </a:p>
         </p:txBody>
@@ -22658,7 +22500,7 @@
               </a:solidFill>
               <a:effectLst/>
               <a:uFillTx/>
-              <a:latin typeface="Arial"/>
+              <a:latin typeface="Arial" panose="020B0604020202020204"/>
             </a:endParaRPr>
           </a:p>
         </p:txBody>
@@ -22725,7 +22567,7 @@
               </a:solidFill>
               <a:effectLst/>
               <a:uFillTx/>
-              <a:latin typeface="Arial"/>
+              <a:latin typeface="Arial" panose="020B0604020202020204"/>
             </a:endParaRPr>
           </a:p>
         </p:txBody>
@@ -22775,7 +22617,7 @@
               </a:solidFill>
               <a:effectLst/>
               <a:uFillTx/>
-              <a:latin typeface="Arial"/>
+              <a:latin typeface="Arial" panose="020B0604020202020204"/>
             </a:endParaRPr>
           </a:p>
         </p:txBody>
@@ -22842,7 +22684,7 @@
               </a:solidFill>
               <a:effectLst/>
               <a:uFillTx/>
-              <a:latin typeface="Arial"/>
+              <a:latin typeface="Arial" panose="020B0604020202020204"/>
             </a:endParaRPr>
           </a:p>
         </p:txBody>
@@ -22895,7 +22737,7 @@
               </a:solidFill>
               <a:effectLst/>
               <a:uFillTx/>
-              <a:latin typeface="Arial"/>
+              <a:latin typeface="Arial" panose="020B0604020202020204"/>
             </a:endParaRPr>
           </a:p>
         </p:txBody>
@@ -22962,7 +22804,7 @@
               </a:solidFill>
               <a:effectLst/>
               <a:uFillTx/>
-              <a:latin typeface="Arial"/>
+              <a:latin typeface="Arial" panose="020B0604020202020204"/>
             </a:endParaRPr>
           </a:p>
         </p:txBody>
@@ -23012,7 +22854,7 @@
               </a:solidFill>
               <a:effectLst/>
               <a:uFillTx/>
-              <a:latin typeface="Arial"/>
+              <a:latin typeface="Arial" panose="020B0604020202020204"/>
             </a:endParaRPr>
           </a:p>
         </p:txBody>
@@ -23079,7 +22921,7 @@
               </a:solidFill>
               <a:effectLst/>
               <a:uFillTx/>
-              <a:latin typeface="Arial"/>
+              <a:latin typeface="Arial" panose="020B0604020202020204"/>
             </a:endParaRPr>
           </a:p>
         </p:txBody>
@@ -23132,7 +22974,7 @@
               </a:solidFill>
               <a:effectLst/>
               <a:uFillTx/>
-              <a:latin typeface="Arial"/>
+              <a:latin typeface="Arial" panose="020B0604020202020204"/>
             </a:endParaRPr>
           </a:p>
         </p:txBody>
@@ -23199,7 +23041,7 @@
               </a:solidFill>
               <a:effectLst/>
               <a:uFillTx/>
-              <a:latin typeface="Arial"/>
+              <a:latin typeface="Arial" panose="020B0604020202020204"/>
             </a:endParaRPr>
           </a:p>
         </p:txBody>
@@ -23249,7 +23091,7 @@
               </a:solidFill>
               <a:effectLst/>
               <a:uFillTx/>
-              <a:latin typeface="Arial"/>
+              <a:latin typeface="Arial" panose="020B0604020202020204"/>
             </a:endParaRPr>
           </a:p>
         </p:txBody>
@@ -23316,7 +23158,7 @@
               </a:solidFill>
               <a:effectLst/>
               <a:uFillTx/>
-              <a:latin typeface="Arial"/>
+              <a:latin typeface="Arial" panose="020B0604020202020204"/>
             </a:endParaRPr>
           </a:p>
         </p:txBody>
@@ -23369,7 +23211,7 @@
               </a:solidFill>
               <a:effectLst/>
               <a:uFillTx/>
-              <a:latin typeface="Arial"/>
+              <a:latin typeface="Arial" panose="020B0604020202020204"/>
             </a:endParaRPr>
           </a:p>
         </p:txBody>
@@ -23436,7 +23278,7 @@
               </a:solidFill>
               <a:effectLst/>
               <a:uFillTx/>
-              <a:latin typeface="Arial"/>
+              <a:latin typeface="Arial" panose="020B0604020202020204"/>
             </a:endParaRPr>
           </a:p>
         </p:txBody>
@@ -23486,7 +23328,7 @@
               </a:solidFill>
               <a:effectLst/>
               <a:uFillTx/>
-              <a:latin typeface="Arial"/>
+              <a:latin typeface="Arial" panose="020B0604020202020204"/>
             </a:endParaRPr>
           </a:p>
         </p:txBody>
@@ -23553,7 +23395,7 @@
               </a:solidFill>
               <a:effectLst/>
               <a:uFillTx/>
-              <a:latin typeface="Arial"/>
+              <a:latin typeface="Arial" panose="020B0604020202020204"/>
             </a:endParaRPr>
           </a:p>
         </p:txBody>
@@ -23606,7 +23448,7 @@
               </a:solidFill>
               <a:effectLst/>
               <a:uFillTx/>
-              <a:latin typeface="Arial"/>
+              <a:latin typeface="Arial" panose="020B0604020202020204"/>
             </a:endParaRPr>
           </a:p>
         </p:txBody>
@@ -23673,7 +23515,7 @@
               </a:solidFill>
               <a:effectLst/>
               <a:uFillTx/>
-              <a:latin typeface="Arial"/>
+              <a:latin typeface="Arial" panose="020B0604020202020204"/>
             </a:endParaRPr>
           </a:p>
         </p:txBody>
@@ -23723,7 +23565,7 @@
               </a:solidFill>
               <a:effectLst/>
               <a:uFillTx/>
-              <a:latin typeface="Arial"/>
+              <a:latin typeface="Arial" panose="020B0604020202020204"/>
             </a:endParaRPr>
           </a:p>
         </p:txBody>
@@ -23790,7 +23632,7 @@
               </a:solidFill>
               <a:effectLst/>
               <a:uFillTx/>
-              <a:latin typeface="Arial"/>
+              <a:latin typeface="Arial" panose="020B0604020202020204"/>
             </a:endParaRPr>
           </a:p>
         </p:txBody>
@@ -23843,7 +23685,7 @@
               </a:solidFill>
               <a:effectLst/>
               <a:uFillTx/>
-              <a:latin typeface="Arial"/>
+              <a:latin typeface="Arial" panose="020B0604020202020204"/>
             </a:endParaRPr>
           </a:p>
         </p:txBody>
@@ -23910,7 +23752,7 @@
               </a:solidFill>
               <a:effectLst/>
               <a:uFillTx/>
-              <a:latin typeface="Arial"/>
+              <a:latin typeface="Arial" panose="020B0604020202020204"/>
             </a:endParaRPr>
           </a:p>
         </p:txBody>
@@ -23977,7 +23819,7 @@
               </a:solidFill>
               <a:effectLst/>
               <a:uFillTx/>
-              <a:latin typeface="Arial"/>
+              <a:latin typeface="Arial" panose="020B0604020202020204"/>
             </a:endParaRPr>
           </a:p>
         </p:txBody>
@@ -24044,7 +23886,7 @@
               </a:solidFill>
               <a:effectLst/>
               <a:uFillTx/>
-              <a:latin typeface="Arial"/>
+              <a:latin typeface="Arial" panose="020B0604020202020204"/>
             </a:endParaRPr>
           </a:p>
         </p:txBody>
@@ -24110,7 +23952,6 @@
                 <a:latin typeface="Aptos"/>
                 <a:ea typeface="Aptos"/>
               </a:rPr>
-              <a:t>8</a:t>
             </a:fld>
             <a:endParaRPr lang="en-US" sz="900" b="0" u="none" strike="noStrike">
               <a:solidFill>
@@ -24118,7 +23959,7 @@
               </a:solidFill>
               <a:effectLst/>
               <a:uFillTx/>
-              <a:latin typeface="Times New Roman"/>
+              <a:latin typeface="Times New Roman" panose="02020603050405020304"/>
             </a:endParaRPr>
           </a:p>
         </p:txBody>
@@ -24211,7 +24052,7 @@
               </a:solidFill>
               <a:effectLst/>
               <a:uFillTx/>
-              <a:latin typeface="Arial"/>
+              <a:latin typeface="Arial" panose="020B0604020202020204"/>
             </a:endParaRPr>
           </a:p>
         </p:txBody>
@@ -24278,7 +24119,7 @@
               </a:solidFill>
               <a:effectLst/>
               <a:uFillTx/>
-              <a:latin typeface="Arial"/>
+              <a:latin typeface="Arial" panose="020B0604020202020204"/>
             </a:endParaRPr>
           </a:p>
         </p:txBody>
@@ -24340,7 +24181,7 @@
               </a:solidFill>
               <a:effectLst/>
               <a:uFillTx/>
-              <a:latin typeface="Arial"/>
+              <a:latin typeface="Arial" panose="020B0604020202020204"/>
             </a:endParaRPr>
           </a:p>
         </p:txBody>
@@ -24407,7 +24248,7 @@
               </a:solidFill>
               <a:effectLst/>
               <a:uFillTx/>
-              <a:latin typeface="Arial"/>
+              <a:latin typeface="Arial" panose="020B0604020202020204"/>
             </a:endParaRPr>
           </a:p>
         </p:txBody>
@@ -24474,7 +24315,7 @@
               </a:solidFill>
               <a:effectLst/>
               <a:uFillTx/>
-              <a:latin typeface="Arial"/>
+              <a:latin typeface="Arial" panose="020B0604020202020204"/>
             </a:endParaRPr>
           </a:p>
           <a:p>
@@ -24492,7 +24333,7 @@
               </a:solidFill>
               <a:effectLst/>
               <a:uFillTx/>
-              <a:latin typeface="Arial"/>
+              <a:latin typeface="Arial" panose="020B0604020202020204"/>
             </a:endParaRPr>
           </a:p>
           <a:p>
@@ -24521,7 +24362,7 @@
               </a:solidFill>
               <a:effectLst/>
               <a:uFillTx/>
-              <a:latin typeface="Arial"/>
+              <a:latin typeface="Arial" panose="020B0604020202020204"/>
             </a:endParaRPr>
           </a:p>
         </p:txBody>
@@ -24576,7 +24417,7 @@
               </a:solidFill>
               <a:effectLst/>
               <a:uFillTx/>
-              <a:latin typeface="Arial"/>
+              <a:latin typeface="Arial" panose="020B0604020202020204"/>
             </a:endParaRPr>
           </a:p>
         </p:txBody>
@@ -24643,7 +24484,7 @@
               </a:solidFill>
               <a:effectLst/>
               <a:uFillTx/>
-              <a:latin typeface="Arial"/>
+              <a:latin typeface="Arial" panose="020B0604020202020204"/>
             </a:endParaRPr>
           </a:p>
         </p:txBody>
@@ -24698,7 +24539,7 @@
               </a:solidFill>
               <a:effectLst/>
               <a:uFillTx/>
-              <a:latin typeface="Arial"/>
+              <a:latin typeface="Arial" panose="020B0604020202020204"/>
             </a:endParaRPr>
           </a:p>
         </p:txBody>
@@ -24765,7 +24606,7 @@
               </a:solidFill>
               <a:effectLst/>
               <a:uFillTx/>
-              <a:latin typeface="Arial"/>
+              <a:latin typeface="Arial" panose="020B0604020202020204"/>
             </a:endParaRPr>
           </a:p>
         </p:txBody>
@@ -24832,7 +24673,7 @@
               </a:solidFill>
               <a:effectLst/>
               <a:uFillTx/>
-              <a:latin typeface="Arial"/>
+              <a:latin typeface="Arial" panose="020B0604020202020204"/>
             </a:endParaRPr>
           </a:p>
         </p:txBody>
@@ -24894,7 +24735,7 @@
               </a:solidFill>
               <a:effectLst/>
               <a:uFillTx/>
-              <a:latin typeface="Arial"/>
+              <a:latin typeface="Arial" panose="020B0604020202020204"/>
             </a:endParaRPr>
           </a:p>
         </p:txBody>
@@ -24961,7 +24802,7 @@
               </a:solidFill>
               <a:effectLst/>
               <a:uFillTx/>
-              <a:latin typeface="Arial"/>
+              <a:latin typeface="Arial" panose="020B0604020202020204"/>
             </a:endParaRPr>
           </a:p>
         </p:txBody>
@@ -25014,7 +24855,7 @@
               </a:solidFill>
               <a:effectLst/>
               <a:uFillTx/>
-              <a:latin typeface="Arial"/>
+              <a:latin typeface="Arial" panose="020B0604020202020204"/>
             </a:endParaRPr>
           </a:p>
         </p:txBody>
@@ -25081,7 +24922,7 @@
               </a:solidFill>
               <a:effectLst/>
               <a:uFillTx/>
-              <a:latin typeface="Arial"/>
+              <a:latin typeface="Arial" panose="020B0604020202020204"/>
             </a:endParaRPr>
           </a:p>
         </p:txBody>
@@ -25148,7 +24989,7 @@
               </a:solidFill>
               <a:effectLst/>
               <a:uFillTx/>
-              <a:latin typeface="Arial"/>
+              <a:latin typeface="Arial" panose="020B0604020202020204"/>
             </a:endParaRPr>
           </a:p>
         </p:txBody>
@@ -25215,7 +25056,7 @@
               </a:solidFill>
               <a:effectLst/>
               <a:uFillTx/>
-              <a:latin typeface="Arial"/>
+              <a:latin typeface="Arial" panose="020B0604020202020204"/>
             </a:endParaRPr>
           </a:p>
         </p:txBody>
@@ -25268,7 +25109,7 @@
               </a:solidFill>
               <a:effectLst/>
               <a:uFillTx/>
-              <a:latin typeface="Arial"/>
+              <a:latin typeface="Arial" panose="020B0604020202020204"/>
             </a:endParaRPr>
           </a:p>
         </p:txBody>
@@ -25335,7 +25176,7 @@
               </a:solidFill>
               <a:effectLst/>
               <a:uFillTx/>
-              <a:latin typeface="Arial"/>
+              <a:latin typeface="Arial" panose="020B0604020202020204"/>
             </a:endParaRPr>
           </a:p>
         </p:txBody>
@@ -25402,7 +25243,7 @@
               </a:solidFill>
               <a:effectLst/>
               <a:uFillTx/>
-              <a:latin typeface="Arial"/>
+              <a:latin typeface="Arial" panose="020B0604020202020204"/>
             </a:endParaRPr>
           </a:p>
         </p:txBody>
@@ -25469,7 +25310,7 @@
               </a:solidFill>
               <a:effectLst/>
               <a:uFillTx/>
-              <a:latin typeface="Arial"/>
+              <a:latin typeface="Arial" panose="020B0604020202020204"/>
             </a:endParaRPr>
           </a:p>
         </p:txBody>
@@ -25522,7 +25363,7 @@
               </a:solidFill>
               <a:effectLst/>
               <a:uFillTx/>
-              <a:latin typeface="Arial"/>
+              <a:latin typeface="Arial" panose="020B0604020202020204"/>
             </a:endParaRPr>
           </a:p>
         </p:txBody>
@@ -25589,7 +25430,7 @@
               </a:solidFill>
               <a:effectLst/>
               <a:uFillTx/>
-              <a:latin typeface="Arial"/>
+              <a:latin typeface="Arial" panose="020B0604020202020204"/>
             </a:endParaRPr>
           </a:p>
         </p:txBody>
@@ -25656,7 +25497,7 @@
               </a:solidFill>
               <a:effectLst/>
               <a:uFillTx/>
-              <a:latin typeface="Arial"/>
+              <a:latin typeface="Arial" panose="020B0604020202020204"/>
             </a:endParaRPr>
           </a:p>
         </p:txBody>
@@ -25723,7 +25564,7 @@
               </a:solidFill>
               <a:effectLst/>
               <a:uFillTx/>
-              <a:latin typeface="Arial"/>
+              <a:latin typeface="Arial" panose="020B0604020202020204"/>
             </a:endParaRPr>
           </a:p>
         </p:txBody>
@@ -25776,7 +25617,7 @@
               </a:solidFill>
               <a:effectLst/>
               <a:uFillTx/>
-              <a:latin typeface="Arial"/>
+              <a:latin typeface="Arial" panose="020B0604020202020204"/>
             </a:endParaRPr>
           </a:p>
         </p:txBody>
@@ -25843,7 +25684,7 @@
               </a:solidFill>
               <a:effectLst/>
               <a:uFillTx/>
-              <a:latin typeface="Arial"/>
+              <a:latin typeface="Arial" panose="020B0604020202020204"/>
             </a:endParaRPr>
           </a:p>
         </p:txBody>
@@ -25910,7 +25751,7 @@
               </a:solidFill>
               <a:effectLst/>
               <a:uFillTx/>
-              <a:latin typeface="Arial"/>
+              <a:latin typeface="Arial" panose="020B0604020202020204"/>
             </a:endParaRPr>
           </a:p>
         </p:txBody>
@@ -25977,7 +25818,7 @@
               </a:solidFill>
               <a:effectLst/>
               <a:uFillTx/>
-              <a:latin typeface="Arial"/>
+              <a:latin typeface="Arial" panose="020B0604020202020204"/>
             </a:endParaRPr>
           </a:p>
         </p:txBody>
@@ -26030,7 +25871,7 @@
               </a:solidFill>
               <a:effectLst/>
               <a:uFillTx/>
-              <a:latin typeface="Arial"/>
+              <a:latin typeface="Arial" panose="020B0604020202020204"/>
             </a:endParaRPr>
           </a:p>
         </p:txBody>
@@ -26097,7 +25938,7 @@
               </a:solidFill>
               <a:effectLst/>
               <a:uFillTx/>
-              <a:latin typeface="Arial"/>
+              <a:latin typeface="Arial" panose="020B0604020202020204"/>
             </a:endParaRPr>
           </a:p>
         </p:txBody>
@@ -26164,7 +26005,7 @@
               </a:solidFill>
               <a:effectLst/>
               <a:uFillTx/>
-              <a:latin typeface="Arial"/>
+              <a:latin typeface="Arial" panose="020B0604020202020204"/>
             </a:endParaRPr>
           </a:p>
         </p:txBody>
@@ -26231,7 +26072,7 @@
               </a:solidFill>
               <a:effectLst/>
               <a:uFillTx/>
-              <a:latin typeface="Arial"/>
+              <a:latin typeface="Arial" panose="020B0604020202020204"/>
             </a:endParaRPr>
           </a:p>
         </p:txBody>
@@ -26284,7 +26125,7 @@
               </a:solidFill>
               <a:effectLst/>
               <a:uFillTx/>
-              <a:latin typeface="Arial"/>
+              <a:latin typeface="Arial" panose="020B0604020202020204"/>
             </a:endParaRPr>
           </a:p>
         </p:txBody>
@@ -26351,7 +26192,7 @@
               </a:solidFill>
               <a:effectLst/>
               <a:uFillTx/>
-              <a:latin typeface="Arial"/>
+              <a:latin typeface="Arial" panose="020B0604020202020204"/>
             </a:endParaRPr>
           </a:p>
         </p:txBody>
@@ -26418,7 +26259,7 @@
               </a:solidFill>
               <a:effectLst/>
               <a:uFillTx/>
-              <a:latin typeface="Arial"/>
+              <a:latin typeface="Arial" panose="020B0604020202020204"/>
             </a:endParaRPr>
           </a:p>
         </p:txBody>
@@ -26485,7 +26326,7 @@
               </a:solidFill>
               <a:effectLst/>
               <a:uFillTx/>
-              <a:latin typeface="Arial"/>
+              <a:latin typeface="Arial" panose="020B0604020202020204"/>
             </a:endParaRPr>
           </a:p>
         </p:txBody>
@@ -26540,7 +26381,7 @@
               </a:solidFill>
               <a:effectLst/>
               <a:uFillTx/>
-              <a:latin typeface="Arial"/>
+              <a:latin typeface="Arial" panose="020B0604020202020204"/>
             </a:endParaRPr>
           </a:p>
         </p:txBody>
@@ -26607,7 +26448,7 @@
               </a:solidFill>
               <a:effectLst/>
               <a:uFillTx/>
-              <a:latin typeface="Arial"/>
+              <a:latin typeface="Arial" panose="020B0604020202020204"/>
             </a:endParaRPr>
           </a:p>
         </p:txBody>
@@ -26673,7 +26514,6 @@
                 <a:latin typeface="Aptos"/>
                 <a:ea typeface="Aptos"/>
               </a:rPr>
-              <a:t>9</a:t>
             </a:fld>
             <a:endParaRPr lang="en-US" sz="900" b="0" u="none" strike="noStrike">
               <a:solidFill>
@@ -26681,7 +26521,7 @@
               </a:solidFill>
               <a:effectLst/>
               <a:uFillTx/>
-              <a:latin typeface="Times New Roman"/>
+              <a:latin typeface="Times New Roman" panose="02020603050405020304"/>
             </a:endParaRPr>
           </a:p>
         </p:txBody>
@@ -26747,7 +26587,7 @@
         <a:cs typeface="DejaVu Sans"/>
       </a:minorFont>
     </a:fontScheme>
-    <a:fmtScheme>
+    <a:fmtScheme name="">
       <a:fillStyleLst>
         <a:solidFill>
           <a:schemeClr val="phClr"/>
@@ -26797,8 +26637,11 @@
       </a:bgFillStyleLst>
     </a:fmtScheme>
   </a:themeElements>
-  <a:objectDefaults/>
-  <a:extraClrSchemeLst/>
+  <a:extLst>
+    <a:ext uri="{05A4C25C-085E-4340-85A3-A5531E510DB2}">
+      <thm15:themeFamily xmlns:thm15="http://schemas.microsoft.com/office/thememl/2012/main" name="Office Theme" id="{62F939B6-93AF-4DB8-9C6B-D6C7DFDC589F}" vid="{4A3C46E8-61CC-4603-A589-7422A47A8E4A}"/>
+    </a:ext>
+  </a:extLst>
 </a:theme>
 </file>
 
@@ -26855,7 +26698,7 @@
         <a:cs typeface="DejaVu Sans"/>
       </a:minorFont>
     </a:fontScheme>
-    <a:fmtScheme>
+    <a:fmtScheme name="">
       <a:fillStyleLst>
         <a:solidFill>
           <a:schemeClr val="phClr"/>
@@ -26905,8 +26748,11 @@
       </a:bgFillStyleLst>
     </a:fmtScheme>
   </a:themeElements>
-  <a:objectDefaults/>
-  <a:extraClrSchemeLst/>
+  <a:extLst>
+    <a:ext uri="{05A4C25C-085E-4340-85A3-A5531E510DB2}">
+      <thm15:themeFamily xmlns:thm15="http://schemas.microsoft.com/office/thememl/2012/main" name="Office Theme" id="{62F939B6-93AF-4DB8-9C6B-D6C7DFDC589F}" vid="{4A3C46E8-61CC-4603-A589-7422A47A8E4A}"/>
+    </a:ext>
+  </a:extLst>
 </a:theme>
 </file>
 
@@ -26963,7 +26809,7 @@
         <a:cs typeface="DejaVu Sans"/>
       </a:minorFont>
     </a:fontScheme>
-    <a:fmtScheme>
+    <a:fmtScheme name="">
       <a:fillStyleLst>
         <a:solidFill>
           <a:schemeClr val="phClr"/>
@@ -27013,7 +26859,10 @@
       </a:bgFillStyleLst>
     </a:fmtScheme>
   </a:themeElements>
-  <a:objectDefaults/>
-  <a:extraClrSchemeLst/>
+  <a:extLst>
+    <a:ext uri="{05A4C25C-085E-4340-85A3-A5531E510DB2}">
+      <thm15:themeFamily xmlns:thm15="http://schemas.microsoft.com/office/thememl/2012/main" name="Office Theme" id="{62F939B6-93AF-4DB8-9C6B-D6C7DFDC589F}" vid="{4A3C46E8-61CC-4603-A589-7422A47A8E4A}"/>
+    </a:ext>
+  </a:extLst>
 </a:theme>
 </file>